--- a/MCP-auth-slides.pptx
+++ b/MCP-auth-slides.pptx
@@ -530,7 +530,7 @@
           <a:lstStyle/>
           <a:p>
             <a:r>
-              <a:t>Open with one sentence of the arc: what MCP is, the security question we chose, the tool, what it found across 83 real servers, and the limits of what it can prove. Replace the footer with your names and the real date.</a:t>
+              <a:t>Open with one sentence of the arc: what MCP is, the security question we chose, the tool, what it found across 83 real servers, and the limits of what it can prove.</a:t>
             </a:r>
           </a:p>
         </p:txBody>
@@ -600,7 +600,7 @@
           <a:lstStyle/>
           <a:p>
             <a:r>
-              <a:t>This slide introduces the checks so later references resolve. Don't read all 14 — say the grouping: whether a stranger can reach the tools (1, 13), transport and discovery hygiene (2–5, 9–11), session and browser defences (6–8), and the two write checks (12, 14). The next slides explain each group. #8 CORS is the only one not drawn from the MCP rules.</a:t>
+              <a:t>This slide introduces the checks so later references resolve, and the Rule column is the point: every check is anchored to a MUST or SHOULD in the spec (only #8 CORS is non-MCP). Don't read all 14 — say the grouping: whether a stranger can reach the tools (1, 13), transport safety (2, 5), discovering the login (3, 4, 10), OAuth hygiene in the metadata (9, 11), session and browser defences (6, 7, 8), and the two write checks (12, 14). The next slides explain each group and cite its clause.</a:t>
             </a:r>
           </a:p>
         </p:txBody>
@@ -740,7 +740,7 @@
           <a:lstStyle/>
           <a:p>
             <a:r>
-              <a:t>Transport and refusal hygiene. #2 actually connects and checks the certificate — 'the URL says https' is not 'TLS works'. #3 is version-gated (a firm rule only from spec 2025-06-18). #5 is tied to the session era (2025-03-26 to 2025-11-25) and is inconclusive on most servers because we don't implement the deprecated two-connection transport it needs — be ready to say that.</a:t>
+              <a:t>Pure transport hygiene now that #3 has moved to discovery. #2 actually connects and checks the certificate — 'the URL says https' is not 'TLS works'. #5 is tied to the session era (2025-03-26 to 2025-11-25) and is inconclusive on most servers because we don't implement the deprecated two-connection transport it needs — be ready to say that.</a:t>
             </a:r>
           </a:p>
         </p:txBody>
@@ -810,7 +810,7 @@
           <a:lstStyle/>
           <a:p>
             <a:r>
-              <a:t>The path-inserted lookup (#4) is the slide-worthy engineering detail: RFC 9728 inserts the well-known segment before the resource's path; probing only the bare domain missed it on essentially every server. We also prefer the exact pointer the 401 gave us. #4 and #10 are two checks because the two pages often belong to two different companies. Both are version-gated.</a:t>
+              <a:t>#3 is the pointer that starts discovery: a correct 401 carries a WWW-Authenticate header naming where to log in. The path-inserted lookup (#4) is the slide-worthy engineering detail: RFC 9728 inserts the well-known segment before the resource's path; probing only the bare domain missed it on essentially every server, and we also prefer the exact pointer the 401 gave us. #4 and #10 are two checks because the two pages often belong to two different companies. All three are version-gated (firm rules from spec 2025-06-18).</a:t>
             </a:r>
           </a:p>
         </p:txBody>
@@ -1090,7 +1090,7 @@
           <a:lstStyle/>
           <a:p>
             <a:r>
-              <a:t>Emphasise: one consistent run — every number that follows comes from the same scan on the same day, directly comparable. No ERROR verdicts because we removed five endpoints that had gone dead since earlier runs. Be first to say 83 is a thin slice.</a:t>
+              <a:t>Emphasise: one consistent run — every number that follows comes from the same scan on the same day, directly comparable. No ERROR verdicts because we removed five endpoints that had gone dead since earlier runs. Name the two populations clearly: the 83 real public servers we MEASURE (from the MCP Registry) versus the 7 local practice servers we BUILT to test the tool (detailed at slide 23). Be first to say 83 is a thin slice of the registry, not internet-wide rates.</a:t>
             </a:r>
           </a:p>
         </p:txBody>
@@ -1160,7 +1160,7 @@
           <a:lstStyle/>
           <a:p>
             <a:r>
-              <a:t>Walk only the highlights (#1=28, open-dcr=38, #13=22). Volunteer the hf.co redirect caveat aloud — it's the kind of thing an examiner finds by clicking one link. The three following slides zoom into the findings that matter.</a:t>
+              <a:t>Walk only the highlights (#1=28, open-dcr=38, #13=22). If asked about #4/#10 precision: hf.co answers a redirect we grade as 'absent' though its target is a valid document, so those two counts are each at least one high — worth conceding if an examiner clicks a link. The three following slides zoom into the findings that matter.</a:t>
             </a:r>
           </a:p>
         </p:txBody>
@@ -1300,7 +1300,7 @@
           <a:lstStyle/>
           <a:p>
             <a:r>
-              <a:t>The professor knows HTTP but not MCP. Frame it: an MCP server is a small web API exposing a menu of actions to an AI; the protocol standardises the menu and the messages but leaves authentication to the implementer. JSON-RPC = calling a named method with parameters and getting a result or error; MCP uses initialize, tools/list, tools/call.</a:t>
+              <a:t>The professor knows HTTP but not MCP. Frame it: an MCP server is a small web API exposing a menu of actions to an AI; the protocol standardises the menu and the messages but leaves security — requiring a login (authentication) and enforcing what a caller may do (authorization) — to the implementer. JSON-RPC = calling a named method with parameters and getting a result or error; MCP uses initialize, tools/list, tools/call.</a:t>
             </a:r>
           </a:p>
         </p:txBody>
@@ -1510,7 +1510,7 @@
           <a:lstStyle/>
           <a:p>
             <a:r>
-              <a:t>#14 is correct — a local demo catches a vulnerable server — but in the wild it is low-yield and expensive: zero findings for 76 registrations. That's the honest cost/yield lesson, mirroring the api.llow.io incident and the out-of-reach deeper gaps. If asked why 200 isn't a finding for #14: the /authorize page returning 200 is just a login form; the dangerous event is a redirect to the attacker's address, which we never saw.</a:t>
+              <a:t>The insight, not the litter: only servers running a real OAuth flow were testable, and none of them mishandled the redirect address (23 confirmed reject, 24 behind a login wall). Security features travel together — the servers mature enough to support DCR + auth-code also validated redirect URIs, foreshadowing 'security tracks maturity' on the closing slide. Cost backup if asked: running the two write checks left 76 client registrations we couldn't delete (38 + 38); all inert, self-expiring, and journalled before any delete attempt. If asked why 200 isn't a finding for #14: the /authorize 200 is just a login form; the dangerous event is a redirect to the attacker's address, which we never saw.</a:t>
             </a:r>
           </a:p>
         </p:txBody>
@@ -1790,7 +1790,7 @@
           <a:lstStyle/>
           <a:p>
             <a:r>
-              <a:t>Close on insight, not a recap. 1) Security correlates with vendor maturity — and the protocol's optional-security design predicts exactly this uneven outcome. 2) Measurement beat inference (#13 vs #1 on six servers), and honest unknowns / zero-finding checks are results, not gaps in the work. 3) The scope is a deliberate boundary; knowing precisely where it sits is the contribution. Then invite questions.</a:t>
+              <a:t>Direction A. Lead with the thesis sentence, slowly. Then the WHY, straight from our proposal: the MCP spec marks authorization OPTIONAL, Anthropic's own quick-start and most YouTube/Google guides stand up a fastMCP server in 2–5 minutes with auth off, and only mention it later as an optional feature — so servers shipping without auth is the predictable default, not a surprise. Then WHAT we found (the maturity gradient) and WHAT we built (a reproducible, evidence-backed instrument). Close on the kicker line, then invite questions.</a:t>
             </a:r>
           </a:p>
         </p:txBody>
@@ -2140,7 +2140,7 @@
           <a:lstStyle/>
           <a:p>
             <a:r>
-              <a:t>Three angles were considered; this one is meaningful AND runnable without accounts on 83 services. Say clearly that 'advertised and enforced, not sound' is the single most important caveat, and that you will return to it at the end (slide 24). The other two angles — token passthrough and identity confusion — need a real logged-in session and evidence on a back-end we can't see.</a:t>
+              <a:t>Three angles were considered; this one is meaningful AND runnable without accounts on 83 services. The question spans the whole authorization surface an outsider can see — transport, discovery (is login advertised), enforcement, and OAuth configuration — the 14 checks introduced next. Stress that 'what a server advertises and enforces at its front door, not whether it is sound behind it' is the single most important caveat, and that you return to it at the end (slide 24). The other two angles — token passthrough and identity confusion — need a real logged-in session and evidence on a back-end we can't see.</a:t>
             </a:r>
           </a:p>
         </p:txBody>
@@ -2280,7 +2280,7 @@
           <a:lstStyle/>
           <a:p>
             <a:r>
-              <a:t>Walk the five boxes left to right. Define the session id and the two login pages in plain terms (already on the slide). Emphasise the concurrency/independence property: it's why the report can never contradict itself and why order doesn't matter.</a:t>
+              <a:t>Walk the five boxes left to right. 'Validate the target' is the pre-flight safety + sanity step (the containment guard on slide 9). 'Handshake' is the MCP initialize call. Define the session id and the two login pages in plain terms (already on the slide). Emphasise the concurrency/independence property: it's why the report can never contradict itself and why order doesn't matter.</a:t>
             </a:r>
           </a:p>
         </p:txBody>
@@ -2350,7 +2350,7 @@
           <a:lstStyle/>
           <a:p>
             <a:r>
-              <a:t>Emphasise that INCONCLUSIVE is honest, not a failure. Two checks got better by saying 'unknown' more often. The 403 example is the strongest illustration: crediting a firewall's refusal as a login was the worst possible direction for a mistake, and fixing it moved that verdict to INCONCLUSIVE. Avoid naming specific check numbers here — the checks are introduced next.</a:t>
+              <a:t>Emphasise that INCONCLUSIVE is honest, not a failure. The #14 example is the clearest: we register a client, then start a login with a redirect URI that was never registered. A strict server rejects it; a broken one would redirect to it. But a server that answers 200 with a login page is genuinely undecidable from outside — resolving it would require completing the login, which we never do. So INCONCLUSIVE is the correct verdict, not a guess or a cop-out. #14 is introduced in full later (slide 22); here it just illustrates the verdict.</a:t>
             </a:r>
           </a:p>
         </p:txBody>
@@ -5742,7 +5742,7 @@
                 </a:solidFill>
                 <a:latin typeface="Calibri"/>
               </a:rPr>
-              <a:t>Workshop project · Course director presentation · 2026</a:t>
+              <a:t>Workshop project · Presenting: Amit Cohen &amp; Yamit Kfir · 2026</a:t>
             </a:r>
           </a:p>
         </p:txBody>
@@ -5873,7 +5873,7 @@
                 </a:solidFill>
                 <a:latin typeface="Calibri"/>
               </a:rPr>
-              <a:t>One check per known weakness. Twelve are read-only; two register a client and are off by default.</a:t>
+              <a:t>One check per known weakness, each anchored to a MUST or SHOULD in the spec. Twelve are read-only; two register a client and are off by default.</a:t>
             </a:r>
           </a:p>
         </p:txBody>
@@ -5888,7 +5888,7 @@
         </p:nvGraphicFramePr>
         <p:xfrm>
           <a:off x="548640" y="1828800"/>
-          <a:ext cx="11064240" cy="4526280"/>
+          <a:ext cx="11064239" cy="4526280"/>
         </p:xfrm>
         <a:graphic>
           <a:graphicData uri="http://schemas.openxmlformats.org/drawingml/2006/table">
@@ -5897,10 +5897,11 @@
                 <a:tableStyleId>{5C22544A-7EE6-4342-B048-85BDC9FD1C3A}</a:tableStyleId>
               </a:tblPr>
               <a:tblGrid>
-                <a:gridCol w="640080"/>
-                <a:gridCol w="4206240"/>
-                <a:gridCol w="5486400"/>
-                <a:gridCol w="731520"/>
+                <a:gridCol w="502920"/>
+                <a:gridCol w="3977639"/>
+                <a:gridCol w="4434840"/>
+                <a:gridCol w="1463040"/>
+                <a:gridCol w="685800"/>
               </a:tblGrid>
               <a:tr h="301752">
                 <a:tc>
@@ -5963,6 +5964,29 @@
                           <a:latin typeface="Calibri"/>
                         </a:rPr>
                         <a:t>What it asks</a:t>
+                      </a:r>
+                    </a:p>
+                  </a:txBody>
+                  <a:tcPr anchor="ctr">
+                    <a:solidFill>
+                      <a:srgbClr val="12233F"/>
+                    </a:solidFill>
+                  </a:tcPr>
+                </a:tc>
+                <a:tc>
+                  <a:txBody>
+                    <a:bodyPr/>
+                    <a:lstStyle/>
+                    <a:p>
+                      <a:pPr algn="ctr"/>
+                      <a:r>
+                        <a:rPr sz="1100" b="1">
+                          <a:solidFill>
+                            <a:srgbClr val="FFFFFF"/>
+                          </a:solidFill>
+                          <a:latin typeface="Calibri"/>
+                        </a:rPr>
+                        <a:t>Rule</a:t>
                       </a:r>
                     </a:p>
                   </a:txBody>
@@ -6073,6 +6097,29 @@
                     <a:p>
                       <a:pPr algn="ctr"/>
                       <a:r>
+                        <a:rPr sz="1050" b="1">
+                          <a:solidFill>
+                            <a:srgbClr val="5C6B7A"/>
+                          </a:solidFill>
+                          <a:latin typeface="Calibri"/>
+                        </a:rPr>
+                        <a:t>SHOULD</a:t>
+                      </a:r>
+                    </a:p>
+                  </a:txBody>
+                  <a:tcPr anchor="ctr" marT="12700" marB="12700">
+                    <a:solidFill>
+                      <a:srgbClr val="FFFFFF"/>
+                    </a:solidFill>
+                  </a:tcPr>
+                </a:tc>
+                <a:tc>
+                  <a:txBody>
+                    <a:bodyPr/>
+                    <a:lstStyle/>
+                    <a:p>
+                      <a:pPr algn="ctr"/>
+                      <a:r>
                         <a:rPr sz="1050" b="0">
                           <a:solidFill>
                             <a:srgbClr val="1B2A3A"/>
@@ -6151,6 +6198,29 @@
                           <a:latin typeface="Calibri"/>
                         </a:rPr>
                         <a:t>Can a stranger run a tool?</a:t>
+                      </a:r>
+                    </a:p>
+                  </a:txBody>
+                  <a:tcPr anchor="ctr" marT="12700" marB="12700">
+                    <a:solidFill>
+                      <a:srgbClr val="F4F8FB"/>
+                    </a:solidFill>
+                  </a:tcPr>
+                </a:tc>
+                <a:tc>
+                  <a:txBody>
+                    <a:bodyPr/>
+                    <a:lstStyle/>
+                    <a:p>
+                      <a:pPr algn="ctr"/>
+                      <a:r>
+                        <a:rPr sz="1050" b="1">
+                          <a:solidFill>
+                            <a:srgbClr val="1C7293"/>
+                          </a:solidFill>
+                          <a:latin typeface="Calibri"/>
+                        </a:rPr>
+                        <a:t>MUST</a:t>
                       </a:r>
                     </a:p>
                   </a:txBody>
@@ -6261,6 +6331,29 @@
                     <a:p>
                       <a:pPr algn="ctr"/>
                       <a:r>
+                        <a:rPr sz="1050" b="1">
+                          <a:solidFill>
+                            <a:srgbClr val="1C7293"/>
+                          </a:solidFill>
+                          <a:latin typeface="Calibri"/>
+                        </a:rPr>
+                        <a:t>MUST</a:t>
+                      </a:r>
+                    </a:p>
+                  </a:txBody>
+                  <a:tcPr anchor="ctr" marT="12700" marB="12700">
+                    <a:solidFill>
+                      <a:srgbClr val="FFFFFF"/>
+                    </a:solidFill>
+                  </a:tcPr>
+                </a:tc>
+                <a:tc>
+                  <a:txBody>
+                    <a:bodyPr/>
+                    <a:lstStyle/>
+                    <a:p>
+                      <a:pPr algn="ctr"/>
+                      <a:r>
                         <a:rPr sz="1050" b="0">
                           <a:solidFill>
                             <a:srgbClr val="1B2A3A"/>
@@ -6339,6 +6432,29 @@
                           <a:latin typeface="Calibri"/>
                         </a:rPr>
                         <a:t>Does the 401 say where to log in?</a:t>
+                      </a:r>
+                    </a:p>
+                  </a:txBody>
+                  <a:tcPr anchor="ctr" marT="12700" marB="12700">
+                    <a:solidFill>
+                      <a:srgbClr val="F4F8FB"/>
+                    </a:solidFill>
+                  </a:tcPr>
+                </a:tc>
+                <a:tc>
+                  <a:txBody>
+                    <a:bodyPr/>
+                    <a:lstStyle/>
+                    <a:p>
+                      <a:pPr algn="ctr"/>
+                      <a:r>
+                        <a:rPr sz="1050" b="1">
+                          <a:solidFill>
+                            <a:srgbClr val="1C7293"/>
+                          </a:solidFill>
+                          <a:latin typeface="Calibri"/>
+                        </a:rPr>
+                        <a:t>MUST</a:t>
                       </a:r>
                     </a:p>
                   </a:txBody>
@@ -6449,6 +6565,29 @@
                     <a:p>
                       <a:pPr algn="ctr"/>
                       <a:r>
+                        <a:rPr sz="1050" b="1">
+                          <a:solidFill>
+                            <a:srgbClr val="1C7293"/>
+                          </a:solidFill>
+                          <a:latin typeface="Calibri"/>
+                        </a:rPr>
+                        <a:t>MUST</a:t>
+                      </a:r>
+                    </a:p>
+                  </a:txBody>
+                  <a:tcPr anchor="ctr" marT="12700" marB="12700">
+                    <a:solidFill>
+                      <a:srgbClr val="FFFFFF"/>
+                    </a:solidFill>
+                  </a:tcPr>
+                </a:tc>
+                <a:tc>
+                  <a:txBody>
+                    <a:bodyPr/>
+                    <a:lstStyle/>
+                    <a:p>
+                      <a:pPr algn="ctr"/>
+                      <a:r>
                         <a:rPr sz="1050" b="0">
                           <a:solidFill>
                             <a:srgbClr val="1B2A3A"/>
@@ -6527,6 +6666,29 @@
                           <a:latin typeface="Calibri"/>
                         </a:rPr>
                         <a:t>Is the session tag leaking in the URL?</a:t>
+                      </a:r>
+                    </a:p>
+                  </a:txBody>
+                  <a:tcPr anchor="ctr" marT="12700" marB="12700">
+                    <a:solidFill>
+                      <a:srgbClr val="F4F8FB"/>
+                    </a:solidFill>
+                  </a:tcPr>
+                </a:tc>
+                <a:tc>
+                  <a:txBody>
+                    <a:bodyPr/>
+                    <a:lstStyle/>
+                    <a:p>
+                      <a:pPr algn="ctr"/>
+                      <a:r>
+                        <a:rPr sz="1050" b="1">
+                          <a:solidFill>
+                            <a:srgbClr val="1C7293"/>
+                          </a:solidFill>
+                          <a:latin typeface="Calibri"/>
+                        </a:rPr>
+                        <a:t>MUST</a:t>
                       </a:r>
                     </a:p>
                   </a:txBody>
@@ -6637,6 +6799,29 @@
                     <a:p>
                       <a:pPr algn="ctr"/>
                       <a:r>
+                        <a:rPr sz="1050" b="1">
+                          <a:solidFill>
+                            <a:srgbClr val="5C6B7A"/>
+                          </a:solidFill>
+                          <a:latin typeface="Calibri"/>
+                        </a:rPr>
+                        <a:t>SHOULD</a:t>
+                      </a:r>
+                    </a:p>
+                  </a:txBody>
+                  <a:tcPr anchor="ctr" marT="12700" marB="12700">
+                    <a:solidFill>
+                      <a:srgbClr val="FFFFFF"/>
+                    </a:solidFill>
+                  </a:tcPr>
+                </a:tc>
+                <a:tc>
+                  <a:txBody>
+                    <a:bodyPr/>
+                    <a:lstStyle/>
+                    <a:p>
+                      <a:pPr algn="ctr"/>
+                      <a:r>
                         <a:rPr sz="1050" b="0">
                           <a:solidFill>
                             <a:srgbClr val="1B2A3A"/>
@@ -6715,6 +6900,29 @@
                           <a:latin typeface="Calibri"/>
                         </a:rPr>
                         <a:t>Is a forged Origin accepted?</a:t>
+                      </a:r>
+                    </a:p>
+                  </a:txBody>
+                  <a:tcPr anchor="ctr" marT="12700" marB="12700">
+                    <a:solidFill>
+                      <a:srgbClr val="F4F8FB"/>
+                    </a:solidFill>
+                  </a:tcPr>
+                </a:tc>
+                <a:tc>
+                  <a:txBody>
+                    <a:bodyPr/>
+                    <a:lstStyle/>
+                    <a:p>
+                      <a:pPr algn="ctr"/>
+                      <a:r>
+                        <a:rPr sz="1050" b="1">
+                          <a:solidFill>
+                            <a:srgbClr val="1C7293"/>
+                          </a:solidFill>
+                          <a:latin typeface="Calibri"/>
+                        </a:rPr>
+                        <a:t>MUST</a:t>
                       </a:r>
                     </a:p>
                   </a:txBody>
@@ -6825,6 +7033,29 @@
                     <a:p>
                       <a:pPr algn="ctr"/>
                       <a:r>
+                        <a:rPr sz="1050" b="1">
+                          <a:solidFill>
+                            <a:srgbClr val="5C6B7A"/>
+                          </a:solidFill>
+                          <a:latin typeface="Calibri"/>
+                        </a:rPr>
+                        <a:t>non-MCP</a:t>
+                      </a:r>
+                    </a:p>
+                  </a:txBody>
+                  <a:tcPr anchor="ctr" marT="12700" marB="12700">
+                    <a:solidFill>
+                      <a:srgbClr val="FFFFFF"/>
+                    </a:solidFill>
+                  </a:tcPr>
+                </a:tc>
+                <a:tc>
+                  <a:txBody>
+                    <a:bodyPr/>
+                    <a:lstStyle/>
+                    <a:p>
+                      <a:pPr algn="ctr"/>
+                      <a:r>
                         <a:rPr sz="1050" b="0">
                           <a:solidFill>
                             <a:srgbClr val="1B2A3A"/>
@@ -6903,6 +7134,29 @@
                           <a:latin typeface="Calibri"/>
                         </a:rPr>
                         <a:t>Any login address on plain http?</a:t>
+                      </a:r>
+                    </a:p>
+                  </a:txBody>
+                  <a:tcPr anchor="ctr" marT="12700" marB="12700">
+                    <a:solidFill>
+                      <a:srgbClr val="F4F8FB"/>
+                    </a:solidFill>
+                  </a:tcPr>
+                </a:tc>
+                <a:tc>
+                  <a:txBody>
+                    <a:bodyPr/>
+                    <a:lstStyle/>
+                    <a:p>
+                      <a:pPr algn="ctr"/>
+                      <a:r>
+                        <a:rPr sz="1050" b="1">
+                          <a:solidFill>
+                            <a:srgbClr val="1C7293"/>
+                          </a:solidFill>
+                          <a:latin typeface="Calibri"/>
+                        </a:rPr>
+                        <a:t>MUST</a:t>
                       </a:r>
                     </a:p>
                   </a:txBody>
@@ -7013,6 +7267,29 @@
                     <a:p>
                       <a:pPr algn="ctr"/>
                       <a:r>
+                        <a:rPr sz="1050" b="1">
+                          <a:solidFill>
+                            <a:srgbClr val="1C7293"/>
+                          </a:solidFill>
+                          <a:latin typeface="Calibri"/>
+                        </a:rPr>
+                        <a:t>MUST</a:t>
+                      </a:r>
+                    </a:p>
+                  </a:txBody>
+                  <a:tcPr anchor="ctr" marT="12700" marB="12700">
+                    <a:solidFill>
+                      <a:srgbClr val="FFFFFF"/>
+                    </a:solidFill>
+                  </a:tcPr>
+                </a:tc>
+                <a:tc>
+                  <a:txBody>
+                    <a:bodyPr/>
+                    <a:lstStyle/>
+                    <a:p>
+                      <a:pPr algn="ctr"/>
+                      <a:r>
                         <a:rPr sz="1050" b="0">
                           <a:solidFill>
                             <a:srgbClr val="1B2A3A"/>
@@ -7091,6 +7368,29 @@
                           <a:latin typeface="Calibri"/>
                         </a:rPr>
                         <a:t>Still offering the removed implicit flow?</a:t>
+                      </a:r>
+                    </a:p>
+                  </a:txBody>
+                  <a:tcPr anchor="ctr" marT="12700" marB="12700">
+                    <a:solidFill>
+                      <a:srgbClr val="F4F8FB"/>
+                    </a:solidFill>
+                  </a:tcPr>
+                </a:tc>
+                <a:tc>
+                  <a:txBody>
+                    <a:bodyPr/>
+                    <a:lstStyle/>
+                    <a:p>
+                      <a:pPr algn="ctr"/>
+                      <a:r>
+                        <a:rPr sz="1050" b="1">
+                          <a:solidFill>
+                            <a:srgbClr val="1C7293"/>
+                          </a:solidFill>
+                          <a:latin typeface="Calibri"/>
+                        </a:rPr>
+                        <a:t>MUST NOT</a:t>
                       </a:r>
                     </a:p>
                   </a:txBody>
@@ -7201,6 +7501,29 @@
                     <a:p>
                       <a:pPr algn="ctr"/>
                       <a:r>
+                        <a:rPr sz="1050" b="1">
+                          <a:solidFill>
+                            <a:srgbClr val="5C6B7A"/>
+                          </a:solidFill>
+                          <a:latin typeface="Calibri"/>
+                        </a:rPr>
+                        <a:t>SHOULD</a:t>
+                      </a:r>
+                    </a:p>
+                  </a:txBody>
+                  <a:tcPr anchor="ctr" marT="12700" marB="12700">
+                    <a:solidFill>
+                      <a:srgbClr val="FFFFFF"/>
+                    </a:solidFill>
+                  </a:tcPr>
+                </a:tc>
+                <a:tc>
+                  <a:txBody>
+                    <a:bodyPr/>
+                    <a:lstStyle/>
+                    <a:p>
+                      <a:pPr algn="ctr"/>
+                      <a:r>
                         <a:rPr sz="1050" b="0">
                           <a:solidFill>
                             <a:srgbClr val="1B2A3A"/>
@@ -7295,6 +7618,29 @@
                     <a:p>
                       <a:pPr algn="ctr"/>
                       <a:r>
+                        <a:rPr sz="1050" b="1">
+                          <a:solidFill>
+                            <a:srgbClr val="1C7293"/>
+                          </a:solidFill>
+                          <a:latin typeface="Calibri"/>
+                        </a:rPr>
+                        <a:t>MUST</a:t>
+                      </a:r>
+                    </a:p>
+                  </a:txBody>
+                  <a:tcPr anchor="ctr" marT="12700" marB="12700">
+                    <a:solidFill>
+                      <a:srgbClr val="F4F8FB"/>
+                    </a:solidFill>
+                  </a:tcPr>
+                </a:tc>
+                <a:tc>
+                  <a:txBody>
+                    <a:bodyPr/>
+                    <a:lstStyle/>
+                    <a:p>
+                      <a:pPr algn="ctr"/>
+                      <a:r>
                         <a:rPr sz="1050" b="0">
                           <a:solidFill>
                             <a:srgbClr val="1B2A3A"/>
@@ -7508,6 +7854,15 @@
               </a:rPr>
               <a:t>no-authentication-remote  —  can a stranger LIST the tools?</a:t>
             </a:r>
+            <a:r>
+              <a:rPr sz="1200" b="1" i="0">
+                <a:solidFill>
+                  <a:srgbClr val="5C6B7A"/>
+                </a:solidFill>
+                <a:latin typeface="Calibri"/>
+              </a:rPr>
+              <a:t>      SHOULD · Transports §Security</a:t>
+            </a:r>
           </a:p>
           <a:p>
             <a:pPr algn="l">
@@ -7623,6 +7978,15 @@
               </a:rPr>
               <a:t>unauthenticated-tool-invocation  —  can a stranger RUN one?</a:t>
             </a:r>
+            <a:r>
+              <a:rPr sz="1200" b="1" i="0">
+                <a:solidFill>
+                  <a:srgbClr val="1C7293"/>
+                </a:solidFill>
+                <a:latin typeface="Calibri"/>
+              </a:rPr>
+              <a:t>      MUST · MCP Authorization</a:t>
+            </a:r>
           </a:p>
           <a:p>
             <a:pPr algn="l">
@@ -7650,8 +8014,8 @@
         </p:nvSpPr>
         <p:spPr>
           <a:xfrm>
-            <a:off x="548640" y="4480560"/>
-            <a:ext cx="11091672" cy="1371600"/>
+            <a:off x="548640" y="4663440"/>
+            <a:ext cx="11091672" cy="1234440"/>
           </a:xfrm>
           <a:prstGeom prst="roundRect">
             <a:avLst>
@@ -7698,8 +8062,8 @@
         </p:nvSpPr>
         <p:spPr>
           <a:xfrm>
-            <a:off x="822959" y="4617720"/>
-            <a:ext cx="10543032" cy="1097280"/>
+            <a:off x="822959" y="4773168"/>
+            <a:ext cx="10543032" cy="1051560"/>
           </a:xfrm>
           <a:prstGeom prst="rect">
             <a:avLst/>
@@ -7733,7 +8097,7 @@
                 </a:solidFill>
                 <a:latin typeface="Calibri"/>
               </a:rPr>
-              <a:t>listing tools is not the same as running them. #1 tells you the menu is visible; #13 tells you whether the kitchen is open. A server can publish its catalogue yet still demand a login to act — only #13 can tell them apart.</a:t>
+              <a:t>reading a menu is not ordering from it. #1 shows the menu is readable by anyone; #13 shows whether a stranger can actually place an order. Plenty of servers hand out the menu but still require a login before they serve — only #13 separates the two.</a:t>
             </a:r>
           </a:p>
         </p:txBody>
@@ -7829,7 +8193,7 @@
                 </a:solidFill>
                 <a:latin typeface="Calibri"/>
               </a:rPr>
-              <a:t>Is the connection itself safe? (#2, #3, #5)</a:t>
+              <a:t>Is the connection itself safe? (#2, #5)</a:t>
             </a:r>
           </a:p>
         </p:txBody>
@@ -7842,8 +8206,8 @@
         </p:nvSpPr>
         <p:spPr>
           <a:xfrm>
-            <a:off x="548640" y="1691640"/>
-            <a:ext cx="11091672" cy="1234440"/>
+            <a:off x="548640" y="1737360"/>
+            <a:ext cx="11091672" cy="1371600"/>
           </a:xfrm>
           <a:prstGeom prst="roundRect">
             <a:avLst>
@@ -7890,8 +8254,8 @@
         </p:nvSpPr>
         <p:spPr>
           <a:xfrm>
-            <a:off x="731520" y="1764792"/>
-            <a:ext cx="10725912" cy="1088136"/>
+            <a:off x="731520" y="1810512"/>
+            <a:ext cx="10725912" cy="1225296"/>
           </a:xfrm>
           <a:prstGeom prst="rect">
             <a:avLst/>
@@ -7930,6 +8294,15 @@
               </a:rPr>
               <a:t>no-tls-transport</a:t>
             </a:r>
+            <a:r>
+              <a:rPr sz="1100" b="1" i="0">
+                <a:solidFill>
+                  <a:srgbClr val="1C7293"/>
+                </a:solidFill>
+                <a:latin typeface="Calibri"/>
+              </a:rPr>
+              <a:t>      MUST · OAuth 2.1 §1.5</a:t>
+            </a:r>
           </a:p>
           <a:p>
             <a:pPr algn="l">
@@ -7957,8 +8330,8 @@
         </p:nvSpPr>
         <p:spPr>
           <a:xfrm>
-            <a:off x="548640" y="3127248"/>
-            <a:ext cx="11091672" cy="1234440"/>
+            <a:off x="548640" y="3383280"/>
+            <a:ext cx="11091672" cy="1371600"/>
           </a:xfrm>
           <a:prstGeom prst="roundRect">
             <a:avLst>
@@ -8005,8 +8378,8 @@
         </p:nvSpPr>
         <p:spPr>
           <a:xfrm>
-            <a:off x="731520" y="3200400"/>
-            <a:ext cx="10725912" cy="1088136"/>
+            <a:off x="731520" y="3456432"/>
+            <a:ext cx="10725912" cy="1225296"/>
           </a:xfrm>
           <a:prstGeom prst="rect">
             <a:avLst/>
@@ -8034,7 +8407,7 @@
                 </a:solidFill>
                 <a:latin typeface="Calibri"/>
               </a:rPr>
-              <a:t>#3  </a:t>
+              <a:t>#5  </a:t>
             </a:r>
             <a:r>
               <a:rPr sz="1400" b="1" i="0">
@@ -8043,7 +8416,16 @@
                 </a:solidFill>
                 <a:latin typeface="Calibri"/>
               </a:rPr>
-              <a:t>missing-www-authenticate</a:t>
+              <a:t>session-id-in-url</a:t>
+            </a:r>
+            <a:r>
+              <a:rPr sz="1100" b="1" i="0">
+                <a:solidFill>
+                  <a:srgbClr val="1C7293"/>
+                </a:solidFill>
+                <a:latin typeface="Calibri"/>
+              </a:rPr>
+              <a:t>      MUST · OAuth 2.1 §5</a:t>
             </a:r>
           </a:p>
           <a:p>
@@ -8059,7 +8441,7 @@
                 </a:solidFill>
                 <a:latin typeface="Calibri"/>
               </a:rPr>
-              <a:t>When a server correctly says 401 “log in first”, it must also say WHERE — a header pointing at its login-info page. Many just say “no” and leave the client stuck.</a:t>
+              <a:t>Is the session tag placed in the web address instead of a header? URLs end up in server logs, browser history and the Referer header — so the tag leaks.</a:t>
             </a:r>
           </a:p>
         </p:txBody>
@@ -8072,8 +8454,8 @@
         </p:nvSpPr>
         <p:spPr>
           <a:xfrm>
-            <a:off x="548640" y="4562856"/>
-            <a:ext cx="11091672" cy="1234440"/>
+            <a:off x="548640" y="5074920"/>
+            <a:ext cx="11091672" cy="914400"/>
           </a:xfrm>
           <a:prstGeom prst="roundRect">
             <a:avLst>
@@ -8083,9 +8465,9 @@
           <a:solidFill>
             <a:srgbClr val="EEF3F8"/>
           </a:solidFill>
-          <a:ln w="12700">
+          <a:ln w="19050">
             <a:solidFill>
-              <a:srgbClr val="C9D6E2"/>
+              <a:srgbClr val="1C7293"/>
             </a:solidFill>
           </a:ln>
           <a:effectLst/>
@@ -8120,8 +8502,8 @@
         </p:nvSpPr>
         <p:spPr>
           <a:xfrm>
-            <a:off x="731520" y="4636008"/>
-            <a:ext cx="10725912" cy="1088136"/>
+            <a:off x="822959" y="5074920"/>
+            <a:ext cx="10543032" cy="914400"/>
           </a:xfrm>
           <a:prstGeom prst="rect">
             <a:avLst/>
@@ -8136,45 +8518,26 @@
           <a:p>
             <a:pPr algn="l">
               <a:lnSpc>
-                <a:spcPct val="100000"/>
-              </a:lnSpc>
-              <a:spcAft>
-                <a:spcPts val="200"/>
-              </a:spcAft>
-            </a:pPr>
-            <a:r>
-              <a:rPr sz="1400" b="1" i="0">
-                <a:solidFill>
-                  <a:srgbClr val="1C7293"/>
-                </a:solidFill>
-                <a:latin typeface="Calibri"/>
-              </a:rPr>
-              <a:t>#5  </a:t>
-            </a:r>
-            <a:r>
-              <a:rPr sz="1400" b="1" i="0">
-                <a:solidFill>
-                  <a:srgbClr val="12233F"/>
-                </a:solidFill>
-                <a:latin typeface="Calibri"/>
-              </a:rPr>
-              <a:t>session-id-in-url</a:t>
-            </a:r>
-          </a:p>
-          <a:p>
-            <a:pPr algn="l">
-              <a:lnSpc>
-                <a:spcPct val="100000"/>
+                <a:spcPct val="105000"/>
               </a:lnSpc>
             </a:pPr>
             <a:r>
-              <a:rPr sz="1200" b="0" i="0">
+              <a:rPr sz="1500" b="1" i="0">
+                <a:solidFill>
+                  <a:srgbClr val="1C7293"/>
+                </a:solidFill>
+                <a:latin typeface="Calibri"/>
+              </a:rPr>
+              <a:t>Both are about the pipe, not the login: </a:t>
+            </a:r>
+            <a:r>
+              <a:rPr sz="1500" b="0" i="0">
                 <a:solidFill>
                   <a:srgbClr val="1B2A3A"/>
                 </a:solidFill>
                 <a:latin typeface="Calibri"/>
               </a:rPr>
-              <a:t>Is the session tag placed in the web address instead of a header? URLs end up in server logs, browser history and the Referer header — so the tag leaks.</a:t>
+              <a:t>is the channel encrypted (#2), and does the session tag stay out of the URL (#5)? A token or session id is only ever as safe as the channel it rides on.</a:t>
             </a:r>
           </a:p>
         </p:txBody>
@@ -8270,7 +8633,7 @@
                 </a:solidFill>
                 <a:latin typeface="Calibri"/>
               </a:rPr>
-              <a:t>Finding the login: the two public pages (#4, #10)</a:t>
+              <a:t>Finding the login: how a client discovers it (#3, #4, #10)</a:t>
             </a:r>
           </a:p>
         </p:txBody>
@@ -8283,8 +8646,8 @@
         </p:nvSpPr>
         <p:spPr>
           <a:xfrm>
-            <a:off x="548640" y="1645920"/>
-            <a:ext cx="11091672" cy="640080"/>
+            <a:off x="548640" y="1508760"/>
+            <a:ext cx="11091672" cy="594360"/>
           </a:xfrm>
           <a:prstGeom prst="rect">
             <a:avLst/>
@@ -8299,53 +8662,71 @@
           <a:p>
             <a:pPr algn="l">
               <a:lnSpc>
-                <a:spcPct val="105000"/>
+                <a:spcPct val="104000"/>
               </a:lnSpc>
             </a:pPr>
             <a:r>
-              <a:rPr sz="1500" b="0" i="0">
+              <a:rPr sz="1400" b="0" i="0">
                 <a:solidFill>
                   <a:srgbClr val="1B2A3A"/>
                 </a:solidFill>
                 <a:latin typeface="Calibri"/>
               </a:rPr>
-              <a:t>Getting into a protected server needs two hops: the MCP server's page says </a:t>
-            </a:r>
-            <a:r>
-              <a:rPr sz="1500" b="0" i="1">
+              <a:t>A caller with no token must discover where to log in. Three steps: the 401 refusal </a:t>
+            </a:r>
+            <a:r>
+              <a:rPr sz="1400" b="0" i="1">
                 <a:solidFill>
                   <a:srgbClr val="1B2A3A"/>
                 </a:solidFill>
                 <a:latin typeface="Calibri"/>
               </a:rPr>
-              <a:t>where</a:t>
-            </a:r>
-            <a:r>
-              <a:rPr sz="1500" b="0" i="0">
+              <a:t>points the way</a:t>
+            </a:r>
+            <a:r>
+              <a:rPr sz="1400" b="0" i="0">
                 <a:solidFill>
                   <a:srgbClr val="1B2A3A"/>
                 </a:solidFill>
                 <a:latin typeface="Calibri"/>
               </a:rPr>
-              <a:t> to log in (PRM); that login server's own page describes </a:t>
-            </a:r>
-            <a:r>
-              <a:rPr sz="1500" b="0" i="1">
+              <a:t> (#3), the MCP server's metadata </a:t>
+            </a:r>
+            <a:r>
+              <a:rPr sz="1400" b="0" i="1">
                 <a:solidFill>
                   <a:srgbClr val="1B2A3A"/>
                 </a:solidFill>
                 <a:latin typeface="Calibri"/>
               </a:rPr>
-              <a:t>itself</a:t>
-            </a:r>
-            <a:r>
-              <a:rPr sz="1500" b="0" i="0">
+              <a:t>names its login server</a:t>
+            </a:r>
+            <a:r>
+              <a:rPr sz="1400" b="0" i="0">
                 <a:solidFill>
                   <a:srgbClr val="1B2A3A"/>
                 </a:solidFill>
                 <a:latin typeface="Calibri"/>
               </a:rPr>
-              <a:t> (AS metadata). Two pages, because they're often run by different companies.</a:t>
+              <a:t> (#4), and that login server </a:t>
+            </a:r>
+            <a:r>
+              <a:rPr sz="1400" b="0" i="1">
+                <a:solidFill>
+                  <a:srgbClr val="1B2A3A"/>
+                </a:solidFill>
+                <a:latin typeface="Calibri"/>
+              </a:rPr>
+              <a:t>describes itself</a:t>
+            </a:r>
+            <a:r>
+              <a:rPr sz="1400" b="0" i="0">
+                <a:solidFill>
+                  <a:srgbClr val="1B2A3A"/>
+                </a:solidFill>
+                <a:latin typeface="Calibri"/>
+              </a:rPr>
+              <a:t> (#10) — often across different companies.</a:t>
             </a:r>
           </a:p>
         </p:txBody>
@@ -8358,8 +8739,8 @@
         </p:nvSpPr>
         <p:spPr>
           <a:xfrm>
-            <a:off x="548640" y="2514600"/>
-            <a:ext cx="11091672" cy="1188720"/>
+            <a:off x="548640" y="2286000"/>
+            <a:ext cx="11091672" cy="1097280"/>
           </a:xfrm>
           <a:prstGeom prst="roundRect">
             <a:avLst>
@@ -8406,8 +8787,8 @@
         </p:nvSpPr>
         <p:spPr>
           <a:xfrm>
-            <a:off x="731520" y="2587752"/>
-            <a:ext cx="10725912" cy="1042416"/>
+            <a:off x="731520" y="2359152"/>
+            <a:ext cx="10725912" cy="950976"/>
           </a:xfrm>
           <a:prstGeom prst="rect">
             <a:avLst/>
@@ -8435,7 +8816,7 @@
                 </a:solidFill>
                 <a:latin typeface="Calibri"/>
               </a:rPr>
-              <a:t>#4  </a:t>
+              <a:t>#3  </a:t>
             </a:r>
             <a:r>
               <a:rPr sz="1400" b="1" i="0">
@@ -8444,7 +8825,16 @@
                 </a:solidFill>
                 <a:latin typeface="Calibri"/>
               </a:rPr>
-              <a:t>missing-protected-resource-metadata</a:t>
+              <a:t>missing-www-authenticate</a:t>
+            </a:r>
+            <a:r>
+              <a:rPr sz="1100" b="1" i="0">
+                <a:solidFill>
+                  <a:srgbClr val="1C7293"/>
+                </a:solidFill>
+                <a:latin typeface="Calibri"/>
+              </a:rPr>
+              <a:t>      MUST · RFC 9728 §5.1</a:t>
             </a:r>
           </a:p>
           <a:p>
@@ -8454,13 +8844,13 @@
               </a:lnSpc>
             </a:pPr>
             <a:r>
-              <a:rPr sz="1200" b="0" i="0">
+              <a:rPr sz="1150" b="0" i="0">
                 <a:solidFill>
                   <a:srgbClr val="1B2A3A"/>
                 </a:solidFill>
                 <a:latin typeface="Calibri"/>
               </a:rPr>
-              <a:t>Does the login-info page exist and name a login server? The address is built by inserting a well-known path segment before the server's own path — checking the bare domain alone would falsely accuse almost every real server.</a:t>
+              <a:t>When a server correctly refuses with 401 “log in first”, it must also say WHERE — a WWW-Authenticate header pointing at its login-info page. Many just say “no” and leave the client stuck with nowhere to go.</a:t>
             </a:r>
           </a:p>
         </p:txBody>
@@ -8473,8 +8863,8 @@
         </p:nvSpPr>
         <p:spPr>
           <a:xfrm>
-            <a:off x="548640" y="3904487"/>
-            <a:ext cx="11091672" cy="1188720"/>
+            <a:off x="548640" y="3520439"/>
+            <a:ext cx="11091672" cy="1097280"/>
           </a:xfrm>
           <a:prstGeom prst="roundRect">
             <a:avLst>
@@ -8521,8 +8911,8 @@
         </p:nvSpPr>
         <p:spPr>
           <a:xfrm>
-            <a:off x="731520" y="3977639"/>
-            <a:ext cx="10725912" cy="1042416"/>
+            <a:off x="731520" y="3593591"/>
+            <a:ext cx="10725912" cy="950976"/>
           </a:xfrm>
           <a:prstGeom prst="rect">
             <a:avLst/>
@@ -8550,7 +8940,7 @@
                 </a:solidFill>
                 <a:latin typeface="Calibri"/>
               </a:rPr>
-              <a:t>#10  </a:t>
+              <a:t>#4  </a:t>
             </a:r>
             <a:r>
               <a:rPr sz="1400" b="1" i="0">
@@ -8559,7 +8949,16 @@
                 </a:solidFill>
                 <a:latin typeface="Calibri"/>
               </a:rPr>
-              <a:t>missing-as-metadata</a:t>
+              <a:t>missing-protected-resource-metadata</a:t>
+            </a:r>
+            <a:r>
+              <a:rPr sz="1100" b="1" i="0">
+                <a:solidFill>
+                  <a:srgbClr val="1C7293"/>
+                </a:solidFill>
+                <a:latin typeface="Calibri"/>
+              </a:rPr>
+              <a:t>      MUST · RFC 9728 §3.1</a:t>
             </a:r>
           </a:p>
           <a:p>
@@ -8569,13 +8968,13 @@
               </a:lnSpc>
             </a:pPr>
             <a:r>
-              <a:rPr sz="1200" b="0" i="0">
+              <a:rPr sz="1150" b="0" i="0">
                 <a:solidFill>
                   <a:srgbClr val="1B2A3A"/>
                 </a:solidFill>
                 <a:latin typeface="Calibri"/>
               </a:rPr>
-              <a:t>Does the login server publish its own description, and does it correctly name itself? A page claiming to belong to someone else must not be trusted.</a:t>
+              <a:t>Does the MCP server publish the page naming its login server? Without it a client can't find where to authenticate. We query the exact spec address (a well-known path inserted before the server's path), not the bare domain — or we'd falsely accuse servers hosted under a path.</a:t>
             </a:r>
           </a:p>
         </p:txBody>
@@ -8588,8 +8987,8 @@
         </p:nvSpPr>
         <p:spPr>
           <a:xfrm>
-            <a:off x="548640" y="5349240"/>
-            <a:ext cx="11091672" cy="548640"/>
+            <a:off x="548640" y="4754879"/>
+            <a:ext cx="11091672" cy="1097280"/>
           </a:xfrm>
           <a:prstGeom prst="roundRect">
             <a:avLst>
@@ -8636,8 +9035,8 @@
         </p:nvSpPr>
         <p:spPr>
           <a:xfrm>
-            <a:off x="822959" y="5349240"/>
-            <a:ext cx="10543032" cy="548640"/>
+            <a:off x="731520" y="4828031"/>
+            <a:ext cx="10725912" cy="950976"/>
           </a:xfrm>
           <a:prstGeom prst="rect">
             <a:avLst/>
@@ -8650,9 +9049,85 @@
           </a:bodyPr>
           <a:lstStyle/>
           <a:p>
+            <a:pPr algn="l">
+              <a:lnSpc>
+                <a:spcPct val="100000"/>
+              </a:lnSpc>
+              <a:spcAft>
+                <a:spcPts val="200"/>
+              </a:spcAft>
+            </a:pPr>
+            <a:r>
+              <a:rPr sz="1400" b="1" i="0">
+                <a:solidFill>
+                  <a:srgbClr val="1C7293"/>
+                </a:solidFill>
+                <a:latin typeface="Calibri"/>
+              </a:rPr>
+              <a:t>#10  </a:t>
+            </a:r>
+            <a:r>
+              <a:rPr sz="1400" b="1" i="0">
+                <a:solidFill>
+                  <a:srgbClr val="12233F"/>
+                </a:solidFill>
+                <a:latin typeface="Calibri"/>
+              </a:rPr>
+              <a:t>missing-as-metadata</a:t>
+            </a:r>
+            <a:r>
+              <a:rPr sz="1100" b="1" i="0">
+                <a:solidFill>
+                  <a:srgbClr val="1C7293"/>
+                </a:solidFill>
+                <a:latin typeface="Calibri"/>
+              </a:rPr>
+              <a:t>      MUST · RFC 8414</a:t>
+            </a:r>
+          </a:p>
+          <a:p>
+            <a:pPr algn="l">
+              <a:lnSpc>
+                <a:spcPct val="100000"/>
+              </a:lnSpc>
+            </a:pPr>
+            <a:r>
+              <a:rPr sz="1150" b="0" i="0">
+                <a:solidFill>
+                  <a:srgbClr val="1B2A3A"/>
+                </a:solidFill>
+                <a:latin typeface="Calibri"/>
+              </a:rPr>
+              <a:t>Does the login server publish its own description, and correctly name itself? A page claiming to belong to someone else must not be trusted.</a:t>
+            </a:r>
+          </a:p>
+        </p:txBody>
+      </p:sp>
+      <p:sp>
+        <p:nvSpPr>
+          <p:cNvPr id="11" name="TextBox 10"/>
+          <p:cNvSpPr txBox="1"/>
+          <p:nvPr/>
+        </p:nvSpPr>
+        <p:spPr>
+          <a:xfrm>
+            <a:off x="548640" y="5943600"/>
+            <a:ext cx="11091672" cy="320040"/>
+          </a:xfrm>
+          <a:prstGeom prst="rect">
+            <a:avLst/>
+          </a:prstGeom>
+          <a:noFill/>
+        </p:spPr>
+        <p:txBody>
+          <a:bodyPr wrap="square" anchor="t" lIns="0" rIns="0" tIns="0" bIns="0">
+            <a:spAutoFit/>
+          </a:bodyPr>
+          <a:lstStyle/>
+          <a:p>
             <a:pPr algn="l"/>
             <a:r>
-              <a:rPr sz="1300" b="0" i="1">
+              <a:rPr sz="1200" b="0" i="1">
                 <a:solidFill>
                   <a:srgbClr val="5C6B7A"/>
                 </a:solidFill>
@@ -8855,6 +9330,15 @@
               </a:rPr>
               <a:t>predictable-session-id</a:t>
             </a:r>
+            <a:r>
+              <a:rPr sz="1100" b="1" i="0">
+                <a:solidFill>
+                  <a:srgbClr val="5C6B7A"/>
+                </a:solidFill>
+                <a:latin typeface="Calibri"/>
+              </a:rPr>
+              <a:t>      SHOULD · Transports §Session Mgmt</a:t>
+            </a:r>
           </a:p>
           <a:p>
             <a:pPr algn="l">
@@ -8970,6 +9454,15 @@
               </a:rPr>
               <a:t>origin-not-validated</a:t>
             </a:r>
+            <a:r>
+              <a:rPr sz="1100" b="1" i="0">
+                <a:solidFill>
+                  <a:srgbClr val="1C7293"/>
+                </a:solidFill>
+                <a:latin typeface="Calibri"/>
+              </a:rPr>
+              <a:t>      MUST · Transports §Security</a:t>
+            </a:r>
           </a:p>
           <a:p>
             <a:pPr algn="l">
@@ -9084,6 +9577,15 @@
                 <a:latin typeface="Calibri"/>
               </a:rPr>
               <a:t>cors-misconfiguration</a:t>
+            </a:r>
+            <a:r>
+              <a:rPr sz="1100" b="1" i="0">
+                <a:solidFill>
+                  <a:srgbClr val="5C6B7A"/>
+                </a:solidFill>
+                <a:latin typeface="Calibri"/>
+              </a:rPr>
+              <a:t>      non-MCP · web security</a:t>
             </a:r>
           </a:p>
           <a:p>
@@ -9296,6 +9798,15 @@
               </a:rPr>
               <a:t>auth-endpoints-not-https</a:t>
             </a:r>
+            <a:r>
+              <a:rPr sz="1100" b="1" i="0">
+                <a:solidFill>
+                  <a:srgbClr val="1C7293"/>
+                </a:solidFill>
+                <a:latin typeface="Calibri"/>
+              </a:rPr>
+              <a:t>      MUST · OAuth 2.1 §1.5</a:t>
+            </a:r>
           </a:p>
           <a:p>
             <a:pPr algn="l">
@@ -9411,6 +9922,15 @@
               </a:rPr>
               <a:t>implicit-flow-enabled</a:t>
             </a:r>
+            <a:r>
+              <a:rPr sz="1100" b="1" i="0">
+                <a:solidFill>
+                  <a:srgbClr val="1C7293"/>
+                </a:solidFill>
+                <a:latin typeface="Calibri"/>
+              </a:rPr>
+              <a:t>      MUST NOT · OAuth 2.1 §1.8</a:t>
+            </a:r>
           </a:p>
           <a:p>
             <a:pPr algn="l">
@@ -9506,13 +10026,22 @@
               </a:lnSpc>
             </a:pPr>
             <a:r>
+              <a:rPr sz="1400" b="1" i="0">
+                <a:solidFill>
+                  <a:srgbClr val="12233F"/>
+                </a:solidFill>
+                <a:latin typeface="Calibri"/>
+              </a:rPr>
+              <a:t>A secure connection to a badly-configured login server is still unsafe. </a:t>
+            </a:r>
+            <a:r>
               <a:rPr sz="1400" b="0" i="0">
                 <a:solidFill>
                   <a:srgbClr val="1B2A3A"/>
                 </a:solidFill>
                 <a:latin typeface="Calibri"/>
               </a:rPr>
-              <a:t>Both read only what the login server already published — no extra traffic. #11 splits space-delimited response types, so a combined value like “id_token token” is correctly caught as offering the implicit grant.</a:t>
+              <a:t>These two catch that in what the server advertises about its own login — before a client ever sends a token. Subtlety in #11: the login server lists its supported modes as one space-separated value, so we parse that list rather than string-match it — that way a combined “id_token token” is still flagged as offering the leaky implicit flow, which a naive check would miss.</a:t>
             </a:r>
           </a:p>
         </p:txBody>
@@ -9709,6 +10238,15 @@
               </a:rPr>
               <a:t>open-dcr</a:t>
             </a:r>
+            <a:r>
+              <a:rPr sz="1100" b="1" i="0">
+                <a:solidFill>
+                  <a:srgbClr val="5C6B7A"/>
+                </a:solidFill>
+                <a:latin typeface="Calibri"/>
+              </a:rPr>
+              <a:t>      SHOULD · RFC 7591 §3</a:t>
+            </a:r>
           </a:p>
           <a:p>
             <a:pPr algn="l">
@@ -9723,7 +10261,7 @@
                 </a:solidFill>
                 <a:latin typeface="Calibri"/>
               </a:rPr>
-              <a:t>Can anyone register an OAuth client with no approval? It sends a real registration, so it writes. Open registration is permitted by the rules — reported as posture, because it is the foothold a bigger attack needs.</a:t>
+              <a:t>Dynamic Client Registration (DCR) lets an app sign itself up with the login server, no human involved. #12 sends a real registration to ask: will the server hand out client credentials to anyone, with no review or vetting? Permitted by the rules, so reported as posture — but it is the foothold a bigger attack needs.</a:t>
             </a:r>
           </a:p>
         </p:txBody>
@@ -9823,6 +10361,15 @@
                 <a:latin typeface="Calibri"/>
               </a:rPr>
               <a:t>improper-redirect-uri-validation</a:t>
+            </a:r>
+            <a:r>
+              <a:rPr sz="1100" b="1" i="0">
+                <a:solidFill>
+                  <a:srgbClr val="1C7293"/>
+                </a:solidFill>
+                <a:latin typeface="Calibri"/>
+              </a:rPr>
+              <a:t>      MUST · OAuth 2.1 §7.5.4</a:t>
             </a:r>
           </a:p>
           <a:p>
@@ -10419,7 +10966,7 @@
         <p:spPr>
           <a:xfrm>
             <a:off x="548640" y="5120640"/>
-            <a:ext cx="11091672" cy="640080"/>
+            <a:ext cx="11091672" cy="731520"/>
           </a:xfrm>
           <a:prstGeom prst="rect">
             <a:avLst/>
@@ -10432,15 +10979,28 @@
           </a:bodyPr>
           <a:lstStyle/>
           <a:p>
-            <a:pPr algn="l"/>
-            <a:r>
-              <a:rPr sz="1400" b="0" i="1">
+            <a:pPr algn="l">
+              <a:lnSpc>
+                <a:spcPct val="104000"/>
+              </a:lnSpc>
+            </a:pPr>
+            <a:r>
+              <a:rPr sz="1400" b="1" i="0">
+                <a:solidFill>
+                  <a:srgbClr val="12233F"/>
+                </a:solidFill>
+                <a:latin typeface="Calibri"/>
+              </a:rPr>
+              <a:t>Two populations. </a:t>
+            </a:r>
+            <a:r>
+              <a:rPr sz="1400" b="0" i="0">
                 <a:solidFill>
                   <a:srgbClr val="5C6B7A"/>
                 </a:solidFill>
                 <a:latin typeface="Calibri"/>
               </a:rPr>
-              <a:t>83 is a slice of the registry, not the whole internet — these are rates within one sample, not internet-wide rates.</a:t>
+              <a:t>These 83 are real, public servers from the official MCP Registry — a public directory of live MCP servers. Separately, we built 7 local practice servers to develop and validate the scanner itself (slide 23).</a:t>
             </a:r>
           </a:p>
         </p:txBody>
@@ -12325,41 +12885,6 @@
           </a:graphicData>
         </a:graphic>
       </p:graphicFrame>
-      <p:sp>
-        <p:nvSpPr>
-          <p:cNvPr id="5" name="TextBox 4"/>
-          <p:cNvSpPr txBox="1"/>
-          <p:nvPr/>
-        </p:nvSpPr>
-        <p:spPr>
-          <a:xfrm>
-            <a:off x="548640" y="6172200"/>
-            <a:ext cx="11091672" cy="320040"/>
-          </a:xfrm>
-          <a:prstGeom prst="rect">
-            <a:avLst/>
-          </a:prstGeom>
-          <a:noFill/>
-        </p:spPr>
-        <p:txBody>
-          <a:bodyPr wrap="square" anchor="t" lIns="0" rIns="0" tIns="0" bIns="0">
-            <a:spAutoFit/>
-          </a:bodyPr>
-          <a:lstStyle/>
-          <a:p>
-            <a:pPr algn="l"/>
-            <a:r>
-              <a:rPr sz="1100" b="0" i="1">
-                <a:solidFill>
-                  <a:srgbClr val="B4740A"/>
-                </a:solidFill>
-                <a:latin typeface="Calibri"/>
-              </a:rPr>
-              <a:t>#4 and #10 are each at least one too high — hf.co answers a redirect we grade as “absent”, but its target is a valid document.</a:t>
-            </a:r>
-          </a:p>
-        </p:txBody>
-      </p:sp>
     </p:spTree>
   </p:cSld>
   <p:clrMapOvr>
@@ -12451,7 +12976,7 @@
                 </a:solidFill>
                 <a:latin typeface="Calibri"/>
               </a:rPr>
-              <a:t>Finding 1: anyone can read the menu</a:t>
+              <a:t>Finding 1: a third disclose their tool list to a stranger</a:t>
             </a:r>
           </a:p>
         </p:txBody>
@@ -12575,7 +13100,7 @@
         </p:nvSpPr>
         <p:spPr>
           <a:xfrm>
-            <a:off x="4023360" y="1874519"/>
+            <a:off x="4023360" y="1828800"/>
             <a:ext cx="7589520" cy="457200"/>
           </a:xfrm>
           <a:prstGeom prst="rect">
@@ -12606,21 +13131,56 @@
                 </a:solidFill>
                 <a:latin typeface="Calibri"/>
               </a:rPr>
-              <a:t> reachable by a stranger.</a:t>
-            </a:r>
-          </a:p>
-        </p:txBody>
-      </p:sp>
-      <p:sp>
-        <p:nvSpPr>
-          <p:cNvPr id="7" name="Rectangle 6"/>
+              <a:t> reachable by a stranger, across those 28 servers.</a:t>
+            </a:r>
+          </a:p>
+        </p:txBody>
+      </p:sp>
+      <p:sp>
+        <p:nvSpPr>
+          <p:cNvPr id="7" name="TextBox 6"/>
+          <p:cNvSpPr txBox="1"/>
+          <p:nvPr/>
+        </p:nvSpPr>
+        <p:spPr>
+          <a:xfrm>
+            <a:off x="4023360" y="2286000"/>
+            <a:ext cx="7589520" cy="274320"/>
+          </a:xfrm>
+          <a:prstGeom prst="rect">
+            <a:avLst/>
+          </a:prstGeom>
+          <a:noFill/>
+        </p:spPr>
+        <p:txBody>
+          <a:bodyPr wrap="square" anchor="t" lIns="0" rIns="0" tIns="0" bIns="0">
+            <a:spAutoFit/>
+          </a:bodyPr>
+          <a:lstStyle/>
+          <a:p>
+            <a:pPr algn="l"/>
+            <a:r>
+              <a:rPr sz="1200" b="0" i="1">
+                <a:solidFill>
+                  <a:srgbClr val="5C6B7A"/>
+                </a:solidFill>
+                <a:latin typeface="Calibri"/>
+              </a:rPr>
+              <a:t>The four servers exposing the most tools (tool count):</a:t>
+            </a:r>
+          </a:p>
+        </p:txBody>
+      </p:sp>
+      <p:sp>
+        <p:nvSpPr>
+          <p:cNvPr id="8" name="Rectangle 7"/>
           <p:cNvSpPr/>
           <p:nvPr/>
         </p:nvSpPr>
         <p:spPr>
           <a:xfrm>
-            <a:off x="4023360" y="2514600"/>
-            <a:ext cx="5486400" cy="310896"/>
+            <a:off x="4023360" y="2651760"/>
+            <a:ext cx="5486400" cy="292608"/>
           </a:xfrm>
           <a:prstGeom prst="rect">
             <a:avLst/>
@@ -12659,14 +13219,14 @@
       </p:sp>
       <p:sp>
         <p:nvSpPr>
-          <p:cNvPr id="8" name="TextBox 7"/>
+          <p:cNvPr id="9" name="TextBox 8"/>
           <p:cNvSpPr txBox="1"/>
           <p:nvPr/>
         </p:nvSpPr>
         <p:spPr>
           <a:xfrm>
-            <a:off x="9619488" y="2487168"/>
-            <a:ext cx="2743200" cy="365760"/>
+            <a:off x="9619488" y="2615184"/>
+            <a:ext cx="2926080" cy="365760"/>
           </a:xfrm>
           <a:prstGeom prst="rect">
             <a:avLst/>
@@ -12687,21 +13247,21 @@
                 </a:solidFill>
                 <a:latin typeface="Calibri"/>
               </a:rPr>
-              <a:t>dock  (71)</a:t>
-            </a:r>
-          </a:p>
-        </p:txBody>
-      </p:sp>
-      <p:sp>
-        <p:nvSpPr>
-          <p:cNvPr id="9" name="Rectangle 8"/>
+              <a:t>dock  (71 tools)</a:t>
+            </a:r>
+          </a:p>
+        </p:txBody>
+      </p:sp>
+      <p:sp>
+        <p:nvSpPr>
+          <p:cNvPr id="10" name="Rectangle 9"/>
           <p:cNvSpPr/>
           <p:nvPr/>
         </p:nvSpPr>
         <p:spPr>
           <a:xfrm>
-            <a:off x="4023360" y="2935224"/>
-            <a:ext cx="5331853" cy="310896"/>
+            <a:off x="4023360" y="3054096"/>
+            <a:ext cx="5331853" cy="292608"/>
           </a:xfrm>
           <a:prstGeom prst="rect">
             <a:avLst/>
@@ -12740,14 +13300,14 @@
       </p:sp>
       <p:sp>
         <p:nvSpPr>
-          <p:cNvPr id="10" name="TextBox 9"/>
+          <p:cNvPr id="11" name="TextBox 10"/>
           <p:cNvSpPr txBox="1"/>
           <p:nvPr/>
         </p:nvSpPr>
         <p:spPr>
           <a:xfrm>
-            <a:off x="9464941" y="2907792"/>
-            <a:ext cx="2743200" cy="365760"/>
+            <a:off x="9464941" y="3017520"/>
+            <a:ext cx="2926080" cy="365760"/>
           </a:xfrm>
           <a:prstGeom prst="rect">
             <a:avLst/>
@@ -12768,21 +13328,21 @@
                 </a:solidFill>
                 <a:latin typeface="Calibri"/>
               </a:rPr>
-              <a:t>switch  (69)</a:t>
-            </a:r>
-          </a:p>
-        </p:txBody>
-      </p:sp>
-      <p:sp>
-        <p:nvSpPr>
-          <p:cNvPr id="11" name="Rectangle 10"/>
+              <a:t>switch  (69 tools)</a:t>
+            </a:r>
+          </a:p>
+        </p:txBody>
+      </p:sp>
+      <p:sp>
+        <p:nvSpPr>
+          <p:cNvPr id="12" name="Rectangle 11"/>
           <p:cNvSpPr/>
           <p:nvPr/>
         </p:nvSpPr>
         <p:spPr>
           <a:xfrm>
-            <a:off x="4023360" y="3355848"/>
-            <a:ext cx="3400022" cy="310896"/>
+            <a:off x="4023360" y="3456432"/>
+            <a:ext cx="3400022" cy="292608"/>
           </a:xfrm>
           <a:prstGeom prst="rect">
             <a:avLst/>
@@ -12821,14 +13381,14 @@
       </p:sp>
       <p:sp>
         <p:nvSpPr>
-          <p:cNvPr id="12" name="TextBox 11"/>
+          <p:cNvPr id="13" name="TextBox 12"/>
           <p:cNvSpPr txBox="1"/>
           <p:nvPr/>
         </p:nvSpPr>
         <p:spPr>
           <a:xfrm>
-            <a:off x="7533110" y="3328416"/>
-            <a:ext cx="2743200" cy="365760"/>
+            <a:off x="7533110" y="3419856"/>
+            <a:ext cx="2926080" cy="365760"/>
           </a:xfrm>
           <a:prstGeom prst="rect">
             <a:avLst/>
@@ -12849,21 +13409,21 @@
                 </a:solidFill>
                 <a:latin typeface="Calibri"/>
               </a:rPr>
-              <a:t>gondola  (44)</a:t>
-            </a:r>
-          </a:p>
-        </p:txBody>
-      </p:sp>
-      <p:sp>
-        <p:nvSpPr>
-          <p:cNvPr id="13" name="Rectangle 12"/>
+              <a:t>gondola  (44 tools)</a:t>
+            </a:r>
+          </a:p>
+        </p:txBody>
+      </p:sp>
+      <p:sp>
+        <p:nvSpPr>
+          <p:cNvPr id="14" name="Rectangle 13"/>
           <p:cNvSpPr/>
           <p:nvPr/>
         </p:nvSpPr>
         <p:spPr>
           <a:xfrm>
-            <a:off x="4023360" y="3776472"/>
-            <a:ext cx="2704563" cy="310896"/>
+            <a:off x="4023360" y="3858768"/>
+            <a:ext cx="2704563" cy="292608"/>
           </a:xfrm>
           <a:prstGeom prst="rect">
             <a:avLst/>
@@ -12902,14 +13462,14 @@
       </p:sp>
       <p:sp>
         <p:nvSpPr>
-          <p:cNvPr id="14" name="TextBox 13"/>
+          <p:cNvPr id="15" name="TextBox 14"/>
           <p:cNvSpPr txBox="1"/>
           <p:nvPr/>
         </p:nvSpPr>
         <p:spPr>
           <a:xfrm>
-            <a:off x="6837651" y="3749039"/>
-            <a:ext cx="2743200" cy="365760"/>
+            <a:off x="6837651" y="3822191"/>
+            <a:ext cx="2926080" cy="365760"/>
           </a:xfrm>
           <a:prstGeom prst="rect">
             <a:avLst/>
@@ -12930,14 +13490,14 @@
                 </a:solidFill>
                 <a:latin typeface="Calibri"/>
               </a:rPr>
-              <a:t>nullary  (35)</a:t>
-            </a:r>
-          </a:p>
-        </p:txBody>
-      </p:sp>
-      <p:sp>
-        <p:nvSpPr>
-          <p:cNvPr id="15" name="TextBox 14"/>
+              <a:t>nullary  (35 tools)</a:t>
+            </a:r>
+          </a:p>
+        </p:txBody>
+      </p:sp>
+      <p:sp>
+        <p:nvSpPr>
+          <p:cNvPr id="16" name="TextBox 15"/>
           <p:cNvSpPr txBox="1"/>
           <p:nvPr/>
         </p:nvSpPr>
@@ -12981,7 +13541,7 @@
       </p:sp>
       <p:sp>
         <p:nvSpPr>
-          <p:cNvPr id="16" name="TextBox 15"/>
+          <p:cNvPr id="17" name="TextBox 16"/>
           <p:cNvSpPr txBox="1"/>
           <p:nvPr/>
         </p:nvSpPr>
@@ -13246,49 +13806,14 @@
                 </a:solidFill>
                 <a:latin typeface="Calibri"/>
               </a:rPr>
-              <a:t>•  Authentication is left to the implementer — which is where things go wrong.</a:t>
-            </a:r>
-          </a:p>
-        </p:txBody>
-      </p:sp>
-      <p:sp>
-        <p:nvSpPr>
-          <p:cNvPr id="6" name="TextBox 5"/>
-          <p:cNvSpPr txBox="1"/>
-          <p:nvPr/>
-        </p:nvSpPr>
-        <p:spPr>
-          <a:xfrm>
-            <a:off x="548640" y="4389120"/>
-            <a:ext cx="6035040" cy="457200"/>
-          </a:xfrm>
-          <a:prstGeom prst="rect">
-            <a:avLst/>
-          </a:prstGeom>
-          <a:noFill/>
-        </p:spPr>
-        <p:txBody>
-          <a:bodyPr wrap="square" anchor="t" lIns="0" rIns="0" tIns="0" bIns="0">
-            <a:spAutoFit/>
-          </a:bodyPr>
-          <a:lstStyle/>
-          <a:p>
-            <a:pPr algn="l"/>
-            <a:r>
-              <a:rPr sz="1300" b="0" i="1">
-                <a:solidFill>
-                  <a:srgbClr val="5C6B7A"/>
-                </a:solidFill>
-                <a:latin typeface="Calibri"/>
-              </a:rPr>
-              <a:t>Real MCP servers you'd recognise: Stripe, Notion, GitHub, Linear, PayPal.</a:t>
-            </a:r>
-          </a:p>
-        </p:txBody>
-      </p:sp>
-      <p:sp>
-        <p:nvSpPr>
-          <p:cNvPr id="7" name="Rounded Rectangle 6"/>
+              <a:t>•  Nothing forces a server to require a login, or to check what a caller may do — both are left to the implementer to enforce.</a:t>
+            </a:r>
+          </a:p>
+        </p:txBody>
+      </p:sp>
+      <p:sp>
+        <p:nvSpPr>
+          <p:cNvPr id="6" name="Rounded Rectangle 5"/>
           <p:cNvSpPr/>
           <p:nvPr/>
         </p:nvSpPr>
@@ -13336,7 +13861,7 @@
       </p:sp>
       <p:sp>
         <p:nvSpPr>
-          <p:cNvPr id="8" name="TextBox 7"/>
+          <p:cNvPr id="7" name="TextBox 6"/>
           <p:cNvSpPr txBox="1"/>
           <p:nvPr/>
         </p:nvSpPr>
@@ -13371,7 +13896,7 @@
       </p:sp>
       <p:sp>
         <p:nvSpPr>
-          <p:cNvPr id="9" name="Rounded Rectangle 8"/>
+          <p:cNvPr id="8" name="Rounded Rectangle 7"/>
           <p:cNvSpPr/>
           <p:nvPr/>
         </p:nvSpPr>
@@ -13419,7 +13944,7 @@
       </p:sp>
       <p:sp>
         <p:nvSpPr>
-          <p:cNvPr id="10" name="TextBox 9"/>
+          <p:cNvPr id="9" name="TextBox 8"/>
           <p:cNvSpPr txBox="1"/>
           <p:nvPr/>
         </p:nvSpPr>
@@ -13454,7 +13979,7 @@
       </p:sp>
       <p:sp>
         <p:nvSpPr>
-          <p:cNvPr id="11" name="Rounded Rectangle 10"/>
+          <p:cNvPr id="10" name="Rounded Rectangle 9"/>
           <p:cNvSpPr/>
           <p:nvPr/>
         </p:nvSpPr>
@@ -13502,7 +14027,7 @@
       </p:sp>
       <p:sp>
         <p:nvSpPr>
-          <p:cNvPr id="12" name="TextBox 11"/>
+          <p:cNvPr id="11" name="TextBox 10"/>
           <p:cNvSpPr txBox="1"/>
           <p:nvPr/>
         </p:nvSpPr>
@@ -13538,7 +14063,7 @@
       </p:sp>
       <p:sp>
         <p:nvSpPr>
-          <p:cNvPr id="13" name="Down Arrow 12"/>
+          <p:cNvPr id="12" name="Down Arrow 11"/>
           <p:cNvSpPr/>
           <p:nvPr/>
         </p:nvSpPr>
@@ -13582,7 +14107,7 @@
       </p:sp>
       <p:sp>
         <p:nvSpPr>
-          <p:cNvPr id="14" name="TextBox 13"/>
+          <p:cNvPr id="13" name="TextBox 12"/>
           <p:cNvSpPr txBox="1"/>
           <p:nvPr/>
         </p:nvSpPr>
@@ -13617,7 +14142,7 @@
       </p:sp>
       <p:sp>
         <p:nvSpPr>
-          <p:cNvPr id="15" name="Right Arrow 14"/>
+          <p:cNvPr id="14" name="Right Arrow 13"/>
           <p:cNvSpPr/>
           <p:nvPr/>
         </p:nvSpPr>
@@ -14167,7 +14692,7 @@
                 </a:solidFill>
                 <a:latin typeface="Calibri"/>
               </a:rPr>
-              <a:t>So the honest headline is 22, not 28. Reporting “anyone can use” on all 28 would have over-stated about a fifth of them — #13 replaces that inference with a measurement.</a:t>
+              <a:t>The measured figure is 22, not 28. Claiming “anyone can use” on all 28 would have over-stated by about a fifth — #13 replaces that inference with a direct measurement.</a:t>
             </a:r>
           </a:p>
         </p:txBody>
@@ -14439,7 +14964,7 @@
                 </a:solidFill>
                 <a:latin typeface="Calibri"/>
               </a:rPr>
-              <a:t>Finding 3: anyone can mint a client</a:t>
+              <a:t>Finding 3: nearly half let anyone register a client</a:t>
             </a:r>
           </a:p>
         </p:txBody>
@@ -15196,7 +15721,7 @@
                 </a:solidFill>
                 <a:latin typeface="Calibri"/>
               </a:rPr>
-              <a:t>Finding 4: a write check that found nothing — and its cost</a:t>
+              <a:t>Finding 4: the write check that found nothing — and what that tells us</a:t>
             </a:r>
           </a:p>
         </p:txBody>
@@ -15411,11 +15936,11 @@
             </a:avLst>
           </a:prstGeom>
           <a:solidFill>
-            <a:srgbClr val="FBEFD8"/>
+            <a:srgbClr val="EEF3F8"/>
           </a:solidFill>
           <a:ln w="19050">
             <a:solidFill>
-              <a:srgbClr val="B4740A"/>
+              <a:srgbClr val="1C7293"/>
             </a:solidFill>
           </a:ln>
           <a:effectLst/>
@@ -15475,11 +16000,11 @@
             <a:r>
               <a:rPr sz="1700" b="1" i="0">
                 <a:solidFill>
-                  <a:srgbClr val="B4740A"/>
-                </a:solidFill>
-                <a:latin typeface="Calibri"/>
-              </a:rPr>
-              <a:t>The cost, stated plainly.</a:t>
+                  <a:srgbClr val="1C7293"/>
+                </a:solidFill>
+                <a:latin typeface="Calibri"/>
+              </a:rPr>
+              <a:t>What the zero tells us.</a:t>
             </a:r>
           </a:p>
           <a:p>
@@ -15498,7 +16023,7 @@
                 </a:solidFill>
                 <a:latin typeface="Calibri"/>
               </a:rPr>
-              <a:t>Running the two write checks created 76 client registrations on other people's servers that we could not delete (38 from #12, 38 from #14). Zero findings, real litter left behind.</a:t>
+              <a:t>Of the 47 we could test, none mishandled the forged return address: 23 rejected it outright, and 24 sat behind a login we can't pass. To even be testable, a server had to run a working OAuth registration-and-authorize flow — and the servers built well enough for that tended to validate the return address correctly too.</a:t>
             </a:r>
           </a:p>
           <a:p>
@@ -15508,13 +16033,13 @@
               </a:lnSpc>
             </a:pPr>
             <a:r>
-              <a:rPr sz="1400" b="0" i="0">
-                <a:solidFill>
-                  <a:srgbClr val="1B2A3A"/>
-                </a:solidFill>
-                <a:latin typeface="Calibri"/>
-              </a:rPr>
-              <a:t>They are inert, expire on their own, and every identifier we created is journalled before any attempt to delete it.</a:t>
+              <a:rPr sz="1400" b="1" i="0">
+                <a:solidFill>
+                  <a:srgbClr val="12233F"/>
+                </a:solidFill>
+                <a:latin typeface="Calibri"/>
+              </a:rPr>
+              <a:t>Secure behaviours cluster: the same servers that gate their tools also get the fiddly OAuth details right.</a:t>
             </a:r>
           </a:p>
         </p:txBody>
@@ -15703,6 +16228,150 @@
         </p:nvSpPr>
         <p:spPr>
           <a:xfrm>
+            <a:off x="548640" y="4434840"/>
+            <a:ext cx="6126480" cy="1508760"/>
+          </a:xfrm>
+          <a:prstGeom prst="roundRect">
+            <a:avLst>
+              <a:gd name="adj" fmla="val 6000"/>
+            </a:avLst>
+          </a:prstGeom>
+          <a:solidFill>
+            <a:srgbClr val="EEF3F8"/>
+          </a:solidFill>
+          <a:ln w="12700">
+            <a:solidFill>
+              <a:srgbClr val="C9D6E2"/>
+            </a:solidFill>
+          </a:ln>
+          <a:effectLst/>
+        </p:spPr>
+        <p:style>
+          <a:lnRef idx="1">
+            <a:schemeClr val="accent1"/>
+          </a:lnRef>
+          <a:fillRef idx="3">
+            <a:schemeClr val="accent1"/>
+          </a:fillRef>
+          <a:effectRef idx="2">
+            <a:schemeClr val="accent1"/>
+          </a:effectRef>
+          <a:fontRef idx="minor">
+            <a:schemeClr val="lt1"/>
+          </a:fontRef>
+        </p:style>
+        <p:txBody>
+          <a:bodyPr rtlCol="0" anchor="ctr"/>
+          <a:lstStyle/>
+          <a:p>
+            <a:pPr algn="ctr"/>
+          </a:p>
+        </p:txBody>
+      </p:sp>
+      <p:sp>
+        <p:nvSpPr>
+          <p:cNvPr id="6" name="TextBox 5"/>
+          <p:cNvSpPr txBox="1"/>
+          <p:nvPr/>
+        </p:nvSpPr>
+        <p:spPr>
+          <a:xfrm>
+            <a:off x="822959" y="4526280"/>
+            <a:ext cx="5577840" cy="1325880"/>
+          </a:xfrm>
+          <a:prstGeom prst="rect">
+            <a:avLst/>
+          </a:prstGeom>
+          <a:noFill/>
+        </p:spPr>
+        <p:txBody>
+          <a:bodyPr wrap="square" anchor="t" lIns="0" rIns="0" tIns="0" bIns="0">
+            <a:spAutoFit/>
+          </a:bodyPr>
+          <a:lstStyle/>
+          <a:p>
+            <a:pPr algn="l">
+              <a:lnSpc>
+                <a:spcPct val="103000"/>
+              </a:lnSpc>
+              <a:spcAft>
+                <a:spcPts val="500"/>
+              </a:spcAft>
+            </a:pPr>
+            <a:r>
+              <a:rPr sz="1300" b="1" i="0">
+                <a:solidFill>
+                  <a:srgbClr val="12233F"/>
+                </a:solidFill>
+                <a:latin typeface="Calibri"/>
+              </a:rPr>
+              <a:t>Real bugs now pinned by a regression test:</a:t>
+            </a:r>
+          </a:p>
+          <a:p>
+            <a:pPr algn="l">
+              <a:lnSpc>
+                <a:spcPct val="103000"/>
+              </a:lnSpc>
+              <a:spcAft>
+                <a:spcPts val="300"/>
+              </a:spcAft>
+            </a:pPr>
+            <a:r>
+              <a:rPr sz="1200" b="0" i="0">
+                <a:solidFill>
+                  <a:srgbClr val="1B2A3A"/>
+                </a:solidFill>
+                <a:latin typeface="Calibri"/>
+              </a:rPr>
+              <a:t>• a blanket 403 was read as “login enforced” → now INCONCLUSIVE (#1)</a:t>
+            </a:r>
+          </a:p>
+          <a:p>
+            <a:pPr algn="l">
+              <a:lnSpc>
+                <a:spcPct val="103000"/>
+              </a:lnSpc>
+              <a:spcAft>
+                <a:spcPts val="300"/>
+              </a:spcAft>
+            </a:pPr>
+            <a:r>
+              <a:rPr sz="1200" b="0" i="0">
+                <a:solidFill>
+                  <a:srgbClr val="1B2A3A"/>
+                </a:solidFill>
+                <a:latin typeface="Calibri"/>
+              </a:rPr>
+              <a:t>• metadata probed only at the bare domain → now builds the exact spec path (#4)</a:t>
+            </a:r>
+          </a:p>
+          <a:p>
+            <a:pPr algn="l">
+              <a:lnSpc>
+                <a:spcPct val="103000"/>
+              </a:lnSpc>
+            </a:pPr>
+            <a:r>
+              <a:rPr sz="1200" b="0" i="0">
+                <a:solidFill>
+                  <a:srgbClr val="1B2A3A"/>
+                </a:solidFill>
+                <a:latin typeface="Calibri"/>
+              </a:rPr>
+              <a:t>• a 403 alone counted as Origin validation → now needs a passing control (#7)</a:t>
+            </a:r>
+          </a:p>
+        </p:txBody>
+      </p:sp>
+      <p:sp>
+        <p:nvSpPr>
+          <p:cNvPr id="7" name="Rounded Rectangle 6"/>
+          <p:cNvSpPr/>
+          <p:nvPr/>
+        </p:nvSpPr>
+        <p:spPr>
+          <a:xfrm>
             <a:off x="7040880" y="1828800"/>
             <a:ext cx="4617720" cy="3657600"/>
           </a:xfrm>
@@ -15745,7 +16414,7 @@
       </p:sp>
       <p:sp>
         <p:nvSpPr>
-          <p:cNvPr id="6" name="TextBox 5"/>
+          <p:cNvPr id="8" name="TextBox 7"/>
           <p:cNvSpPr txBox="1"/>
           <p:nvPr/>
         </p:nvSpPr>
@@ -15914,7 +16583,7 @@
                 </a:solidFill>
                 <a:latin typeface="Calibri"/>
               </a:rPr>
-              <a:t>SCOPE — THE CAVEAT THAT MATTERS</a:t>
+              <a:t>SCOPE</a:t>
             </a:r>
           </a:p>
         </p:txBody>
@@ -16399,7 +17068,7 @@
                 </a:solidFill>
                 <a:latin typeface="Calibri"/>
               </a:rPr>
-              <a:t>We deliberately scoped the project to what a no-credential caller can observe. The dangerous mistakes live on that second hop — a server passing your token to a back-end that shouldn't get it, or mixing up two users — which is not observable from outside in any case.</a:t>
+              <a:t>We deliberately scoped the project to what a no-credential caller can observe. Some dangerous mistakes live on that second hop — a server passing your token to a back-end that shouldn't get it, or mixing up two users — which is not observable from outside in any case.</a:t>
             </a:r>
           </a:p>
         </p:txBody>
@@ -16495,7 +17164,7 @@
                 </a:solidFill>
                 <a:latin typeface="Calibri"/>
               </a:rPr>
-              <a:t>The rules moved ahead — the installed base lags</a:t>
+              <a:t>The rules moved ahead</a:t>
             </a:r>
           </a:p>
         </p:txBody>
@@ -16715,7 +17384,7 @@
                 </a:solidFill>
                 <a:latin typeface="Calibri"/>
               </a:rPr>
-              <a:t>•  Publishing the login-info page is now unconditional — which makes check #4 stronger, the only one the new rules tightened.</a:t>
+              <a:t>•  Publishing the login-info page is now unconditional — which makes check #4 stronger.</a:t>
             </a:r>
           </a:p>
           <a:p>
@@ -16773,7 +17442,7 @@
         </p:nvSpPr>
         <p:spPr>
           <a:xfrm>
-            <a:off x="548640" y="640080"/>
+            <a:off x="548640" y="502920"/>
             <a:ext cx="11091672" cy="365760"/>
           </a:xfrm>
           <a:prstGeom prst="rect">
@@ -16808,8 +17477,8 @@
         </p:nvSpPr>
         <p:spPr>
           <a:xfrm>
-            <a:off x="548640" y="1051560"/>
-            <a:ext cx="11091672" cy="822960"/>
+            <a:off x="548640" y="914400"/>
+            <a:ext cx="11091672" cy="1188720"/>
           </a:xfrm>
           <a:prstGeom prst="rect">
             <a:avLst/>
@@ -16822,29 +17491,90 @@
           </a:bodyPr>
           <a:lstStyle/>
           <a:p>
-            <a:pPr algn="l"/>
-            <a:r>
-              <a:rPr sz="2700" b="1" i="0">
+            <a:pPr algn="l">
+              <a:lnSpc>
+                <a:spcPct val="105000"/>
+              </a:lnSpc>
+            </a:pPr>
+            <a:r>
+              <a:rPr sz="2400" b="1" i="0">
                 <a:solidFill>
                   <a:srgbClr val="FFFFFF"/>
                 </a:solidFill>
                 <a:latin typeface="Calibri"/>
               </a:rPr>
-              <a:t>Three things worth taking away</a:t>
-            </a:r>
-          </a:p>
-        </p:txBody>
-      </p:sp>
-      <p:sp>
-        <p:nvSpPr>
-          <p:cNvPr id="4" name="Rounded Rectangle 3"/>
+              <a:t>MCP makes security optional — so the real question isn't whether it's secure, but which servers chose to be.</a:t>
+            </a:r>
+          </a:p>
+        </p:txBody>
+      </p:sp>
+      <p:sp>
+        <p:nvSpPr>
+          <p:cNvPr id="4" name="TextBox 3"/>
+          <p:cNvSpPr txBox="1"/>
+          <p:nvPr/>
+        </p:nvSpPr>
+        <p:spPr>
+          <a:xfrm>
+            <a:off x="548640" y="2240280"/>
+            <a:ext cx="11091672" cy="822960"/>
+          </a:xfrm>
+          <a:prstGeom prst="rect">
+            <a:avLst/>
+          </a:prstGeom>
+          <a:noFill/>
+        </p:spPr>
+        <p:txBody>
+          <a:bodyPr wrap="square" anchor="t" lIns="0" rIns="0" tIns="0" bIns="0">
+            <a:spAutoFit/>
+          </a:bodyPr>
+          <a:lstStyle/>
+          <a:p>
+            <a:pPr algn="l">
+              <a:lnSpc>
+                <a:spcPct val="105000"/>
+              </a:lnSpc>
+            </a:pPr>
+            <a:r>
+              <a:rPr sz="1500" b="0" i="0">
+                <a:solidFill>
+                  <a:srgbClr val="CADCFC"/>
+                </a:solidFill>
+                <a:latin typeface="Calibri"/>
+              </a:rPr>
+              <a:t>The spec marks authorization </a:t>
+            </a:r>
+            <a:r>
+              <a:rPr sz="1500" b="1" i="0">
+                <a:solidFill>
+                  <a:srgbClr val="F0C97A"/>
+                </a:solidFill>
+                <a:latin typeface="Calibri"/>
+              </a:rPr>
+              <a:t>OPTIONAL</a:t>
+            </a:r>
+            <a:r>
+              <a:rPr sz="1500" b="0" i="0">
+                <a:solidFill>
+                  <a:srgbClr val="CADCFC"/>
+                </a:solidFill>
+                <a:latin typeface="Calibri"/>
+              </a:rPr>
+              <a:t>, and most quick-starts spin up a server in two minutes with auth left off. Vulnerability in the wild isn't an accident — it's the default.</a:t>
+            </a:r>
+          </a:p>
+        </p:txBody>
+      </p:sp>
+      <p:sp>
+        <p:nvSpPr>
+          <p:cNvPr id="5" name="Rounded Rectangle 4"/>
           <p:cNvSpPr/>
           <p:nvPr/>
         </p:nvSpPr>
         <p:spPr>
           <a:xfrm>
-            <a:off x="548640" y="2057400"/>
-            <a:ext cx="11091672" cy="1280160"/>
+            <a:off x="548640" y="3200400"/>
+            <a:ext cx="5408676" cy="1874519"/>
           </a:xfrm>
           <a:prstGeom prst="roundRect">
             <a:avLst>
@@ -16885,14 +17615,14 @@
       </p:sp>
       <p:sp>
         <p:nvSpPr>
-          <p:cNvPr id="5" name="TextBox 4"/>
+          <p:cNvPr id="6" name="TextBox 5"/>
           <p:cNvSpPr txBox="1"/>
           <p:nvPr/>
         </p:nvSpPr>
         <p:spPr>
           <a:xfrm>
-            <a:off x="868680" y="2203704"/>
-            <a:ext cx="10451592" cy="987552"/>
+            <a:off x="822959" y="3364992"/>
+            <a:ext cx="4860036" cy="1554480"/>
           </a:xfrm>
           <a:prstGeom prst="rect">
             <a:avLst/>
@@ -16900,33 +17630,33 @@
           <a:noFill/>
         </p:spPr>
         <p:txBody>
-          <a:bodyPr wrap="square" anchor="ctr" lIns="0" rIns="0" tIns="0" bIns="0">
+          <a:bodyPr wrap="square" anchor="t" lIns="0" rIns="0" tIns="0" bIns="0">
             <a:spAutoFit/>
           </a:bodyPr>
           <a:lstStyle/>
           <a:p>
             <a:pPr algn="l">
               <a:lnSpc>
-                <a:spcPct val="103000"/>
+                <a:spcPct val="104000"/>
               </a:lnSpc>
               <a:spcAft>
-                <a:spcPts val="400"/>
+                <a:spcPts val="500"/>
               </a:spcAft>
             </a:pPr>
             <a:r>
-              <a:rPr sz="1800" b="1" i="0">
+              <a:rPr sz="1600" b="1" i="0">
                 <a:solidFill>
                   <a:srgbClr val="02C39A"/>
                 </a:solidFill>
                 <a:latin typeface="Calibri"/>
               </a:rPr>
-              <a:t>Security tracks maturity</a:t>
+              <a:t>What we found</a:t>
             </a:r>
           </a:p>
           <a:p>
             <a:pPr algn="l">
               <a:lnSpc>
-                <a:spcPct val="103000"/>
+                <a:spcPct val="104000"/>
               </a:lnSpc>
             </a:pPr>
             <a:r>
@@ -16936,21 +17666,21 @@
                 </a:solidFill>
                 <a:latin typeface="Calibri"/>
               </a:rPr>
-              <a:t>Every recognisable vendor gated its tools; the servers open to a stranger were the newer, lesser-known ones. When a protocol makes security optional, that uneven outcome is the predictable result — not an accident.</a:t>
-            </a:r>
-          </a:p>
-        </p:txBody>
-      </p:sp>
-      <p:sp>
-        <p:nvSpPr>
-          <p:cNvPr id="6" name="Rounded Rectangle 5"/>
+              <a:t>Every recognisable vendor gated its tools; the servers open to a stranger were the newer, lesser-known ones — exactly what optional security predicts.</a:t>
+            </a:r>
+          </a:p>
+        </p:txBody>
+      </p:sp>
+      <p:sp>
+        <p:nvSpPr>
+          <p:cNvPr id="7" name="Rounded Rectangle 6"/>
           <p:cNvSpPr/>
           <p:nvPr/>
         </p:nvSpPr>
         <p:spPr>
           <a:xfrm>
-            <a:off x="548640" y="3474720"/>
-            <a:ext cx="11091672" cy="1280160"/>
+            <a:off x="6231636" y="3200400"/>
+            <a:ext cx="5408676" cy="1874519"/>
           </a:xfrm>
           <a:prstGeom prst="roundRect">
             <a:avLst>
@@ -16991,14 +17721,14 @@
       </p:sp>
       <p:sp>
         <p:nvSpPr>
-          <p:cNvPr id="7" name="TextBox 6"/>
+          <p:cNvPr id="8" name="TextBox 7"/>
           <p:cNvSpPr txBox="1"/>
           <p:nvPr/>
         </p:nvSpPr>
         <p:spPr>
           <a:xfrm>
-            <a:off x="868680" y="3621024"/>
-            <a:ext cx="10451592" cy="987552"/>
+            <a:off x="6505955" y="3364992"/>
+            <a:ext cx="4860036" cy="1554480"/>
           </a:xfrm>
           <a:prstGeom prst="rect">
             <a:avLst/>
@@ -17006,33 +17736,33 @@
           <a:noFill/>
         </p:spPr>
         <p:txBody>
-          <a:bodyPr wrap="square" anchor="ctr" lIns="0" rIns="0" tIns="0" bIns="0">
+          <a:bodyPr wrap="square" anchor="t" lIns="0" rIns="0" tIns="0" bIns="0">
             <a:spAutoFit/>
           </a:bodyPr>
           <a:lstStyle/>
           <a:p>
             <a:pPr algn="l">
               <a:lnSpc>
-                <a:spcPct val="103000"/>
+                <a:spcPct val="104000"/>
               </a:lnSpc>
               <a:spcAft>
-                <a:spcPts val="400"/>
+                <a:spcPts val="500"/>
               </a:spcAft>
             </a:pPr>
             <a:r>
-              <a:rPr sz="1800" b="1" i="0">
+              <a:rPr sz="1600" b="1" i="0">
                 <a:solidFill>
                   <a:srgbClr val="02C39A"/>
                 </a:solidFill>
                 <a:latin typeface="Calibri"/>
               </a:rPr>
-              <a:t>Measuring beats inferring</a:t>
+              <a:t>What we built</a:t>
             </a:r>
           </a:p>
           <a:p>
             <a:pPr algn="l">
               <a:lnSpc>
-                <a:spcPct val="103000"/>
+                <a:spcPct val="104000"/>
               </a:lnSpc>
             </a:pPr>
             <a:r>
@@ -17042,113 +17772,7 @@
                 </a:solidFill>
                 <a:latin typeface="Calibri"/>
               </a:rPr>
-              <a:t>#13 corrected #1 on six servers — listing a tool is not the same as being able to run it. And an honest “I don't know”, or a check that finds nothing, is itself a result. Rigour is knowing exactly what you have and haven't shown.</a:t>
-            </a:r>
-          </a:p>
-        </p:txBody>
-      </p:sp>
-      <p:sp>
-        <p:nvSpPr>
-          <p:cNvPr id="8" name="Rounded Rectangle 7"/>
-          <p:cNvSpPr/>
-          <p:nvPr/>
-        </p:nvSpPr>
-        <p:spPr>
-          <a:xfrm>
-            <a:off x="548640" y="4892040"/>
-            <a:ext cx="11091672" cy="1280160"/>
-          </a:xfrm>
-          <a:prstGeom prst="roundRect">
-            <a:avLst>
-              <a:gd name="adj" fmla="val 6000"/>
-            </a:avLst>
-          </a:prstGeom>
-          <a:solidFill>
-            <a:srgbClr val="1B3050"/>
-          </a:solidFill>
-          <a:ln w="12700">
-            <a:solidFill>
-              <a:srgbClr val="1C7293"/>
-            </a:solidFill>
-          </a:ln>
-          <a:effectLst/>
-        </p:spPr>
-        <p:style>
-          <a:lnRef idx="1">
-            <a:schemeClr val="accent1"/>
-          </a:lnRef>
-          <a:fillRef idx="3">
-            <a:schemeClr val="accent1"/>
-          </a:fillRef>
-          <a:effectRef idx="2">
-            <a:schemeClr val="accent1"/>
-          </a:effectRef>
-          <a:fontRef idx="minor">
-            <a:schemeClr val="lt1"/>
-          </a:fontRef>
-        </p:style>
-        <p:txBody>
-          <a:bodyPr rtlCol="0" anchor="ctr"/>
-          <a:lstStyle/>
-          <a:p>
-            <a:pPr algn="ctr"/>
-          </a:p>
-        </p:txBody>
-      </p:sp>
-      <p:sp>
-        <p:nvSpPr>
-          <p:cNvPr id="9" name="TextBox 8"/>
-          <p:cNvSpPr txBox="1"/>
-          <p:nvPr/>
-        </p:nvSpPr>
-        <p:spPr>
-          <a:xfrm>
-            <a:off x="868680" y="5038344"/>
-            <a:ext cx="10451592" cy="987552"/>
-          </a:xfrm>
-          <a:prstGeom prst="rect">
-            <a:avLst/>
-          </a:prstGeom>
-          <a:noFill/>
-        </p:spPr>
-        <p:txBody>
-          <a:bodyPr wrap="square" anchor="ctr" lIns="0" rIns="0" tIns="0" bIns="0">
-            <a:spAutoFit/>
-          </a:bodyPr>
-          <a:lstStyle/>
-          <a:p>
-            <a:pPr algn="l">
-              <a:lnSpc>
-                <a:spcPct val="103000"/>
-              </a:lnSpc>
-              <a:spcAft>
-                <a:spcPts val="400"/>
-              </a:spcAft>
-            </a:pPr>
-            <a:r>
-              <a:rPr sz="1800" b="1" i="0">
-                <a:solidFill>
-                  <a:srgbClr val="02C39A"/>
-                </a:solidFill>
-                <a:latin typeface="Calibri"/>
-              </a:rPr>
-              <a:t>The boundary is the contribution</a:t>
-            </a:r>
-          </a:p>
-          <a:p>
-            <a:pPr algn="l">
-              <a:lnSpc>
-                <a:spcPct val="103000"/>
-              </a:lnSpc>
-            </a:pPr>
-            <a:r>
-              <a:rPr sz="1400" b="0" i="0">
-                <a:solidFill>
-                  <a:srgbClr val="E6EEF5"/>
-                </a:solidFill>
-                <a:latin typeface="Calibri"/>
-              </a:rPr>
-              <a:t>Without ever logging in, you can establish — with evidence — what a server advertises and enforces, and no further. We drew that line deliberately and stayed inside it; knowing precisely where it sits is the point.</a:t>
+              <a:t>An instrument that turns anecdote into measurement: 14 rule-based checks, each carrying its request and reply, reproducible against any public server — no login required.</a:t>
             </a:r>
           </a:p>
         </p:txBody>
@@ -19154,7 +19778,7 @@
         </p:nvSpPr>
         <p:spPr>
           <a:xfrm>
-            <a:off x="548640" y="1737360"/>
+            <a:off x="548640" y="1691640"/>
             <a:ext cx="11091672" cy="457200"/>
           </a:xfrm>
           <a:prstGeom prst="rect">
@@ -19185,7 +19809,7 @@
                 </a:solidFill>
                 <a:latin typeface="Calibri"/>
               </a:rPr>
-              <a:t>requires</a:t>
+              <a:t>requires and recommends</a:t>
             </a:r>
             <a:r>
               <a:rPr sz="1600" b="0" i="0">
@@ -19219,57 +19843,13 @@
       </p:sp>
       <p:sp>
         <p:nvSpPr>
-          <p:cNvPr id="5" name="TextBox 4"/>
-          <p:cNvSpPr txBox="1"/>
-          <p:nvPr/>
-        </p:nvSpPr>
-        <p:spPr>
-          <a:xfrm>
-            <a:off x="548640" y="2286000"/>
-            <a:ext cx="11091672" cy="457200"/>
-          </a:xfrm>
-          <a:prstGeom prst="rect">
-            <a:avLst/>
-          </a:prstGeom>
-          <a:noFill/>
-        </p:spPr>
-        <p:txBody>
-          <a:bodyPr wrap="square" anchor="t" lIns="0" rIns="0" tIns="0" bIns="0">
-            <a:spAutoFit/>
-          </a:bodyPr>
-          <a:lstStyle/>
-          <a:p>
-            <a:pPr algn="l"/>
-            <a:r>
-              <a:rPr sz="1500" b="0" i="0">
-                <a:solidFill>
-                  <a:srgbClr val="5C6B7A"/>
-                </a:solidFill>
-                <a:latin typeface="Calibri"/>
-              </a:rPr>
-              <a:t>Supervisor's steer:  </a:t>
-            </a:r>
-            <a:r>
-              <a:rPr sz="1500" b="0" i="1">
-                <a:solidFill>
-                  <a:srgbClr val="12233F"/>
-                </a:solidFill>
-                <a:latin typeface="Calibri"/>
-              </a:rPr>
-              <a:t>“focus on ONE angle — you can't cover everything.”</a:t>
-            </a:r>
-          </a:p>
-        </p:txBody>
-      </p:sp>
-      <p:sp>
-        <p:nvSpPr>
-          <p:cNvPr id="6" name="Rounded Rectangle 5"/>
+          <p:cNvPr id="5" name="Rounded Rectangle 4"/>
           <p:cNvSpPr/>
           <p:nvPr/>
         </p:nvSpPr>
         <p:spPr>
           <a:xfrm>
-            <a:off x="548640" y="3017520"/>
+            <a:off x="548640" y="2240280"/>
             <a:ext cx="11091672" cy="1280160"/>
           </a:xfrm>
           <a:prstGeom prst="roundRect">
@@ -19311,14 +19891,14 @@
       </p:sp>
       <p:sp>
         <p:nvSpPr>
-          <p:cNvPr id="7" name="TextBox 6"/>
+          <p:cNvPr id="6" name="TextBox 5"/>
           <p:cNvSpPr txBox="1"/>
           <p:nvPr/>
         </p:nvSpPr>
         <p:spPr>
           <a:xfrm>
-            <a:off x="822959" y="3127248"/>
-            <a:ext cx="10543032" cy="1051560"/>
+            <a:off x="822959" y="2286000"/>
+            <a:ext cx="10543032" cy="1188720"/>
           </a:xfrm>
           <a:prstGeom prst="rect">
             <a:avLst/>
@@ -19333,57 +19913,39 @@
           <a:p>
             <a:pPr algn="l">
               <a:lnSpc>
-                <a:spcPct val="105000"/>
+                <a:spcPct val="104000"/>
               </a:lnSpc>
             </a:pPr>
             <a:r>
-              <a:rPr sz="2000" b="1" i="0">
+              <a:rPr sz="1900" b="1" i="0">
                 <a:solidFill>
                   <a:srgbClr val="1C7293"/>
                 </a:solidFill>
                 <a:latin typeface="Calibri"/>
               </a:rPr>
-              <a:t>Our angle:  </a:t>
-            </a:r>
-            <a:r>
-              <a:rPr sz="2000" b="0" i="0">
+              <a:t>Our question:  </a:t>
+            </a:r>
+            <a:r>
+              <a:rPr sz="1900" b="0" i="0">
                 <a:solidFill>
                   <a:srgbClr val="1B2A3A"/>
                 </a:solidFill>
                 <a:latin typeface="Calibri"/>
               </a:rPr>
-              <a:t>Does a server correctly </a:t>
-            </a:r>
-            <a:r>
-              <a:rPr sz="2000" b="1" i="0">
-                <a:solidFill>
-                  <a:srgbClr val="12233F"/>
-                </a:solidFill>
-                <a:latin typeface="Calibri"/>
-              </a:rPr>
-              <a:t>advertise and enforce</a:t>
-            </a:r>
-            <a:r>
-              <a:rPr sz="2000" b="0" i="0">
-                <a:solidFill>
-                  <a:srgbClr val="1B2A3A"/>
-                </a:solidFill>
-                <a:latin typeface="Calibri"/>
-              </a:rPr>
-              <a:t> its login, seen by a caller holding no credentials?</a:t>
-            </a:r>
-          </a:p>
-        </p:txBody>
-      </p:sp>
-      <p:sp>
-        <p:nvSpPr>
-          <p:cNvPr id="8" name="TextBox 7"/>
+              <a:t>Do real MCP servers implement MCP's authorization rules correctly — and can an outside caller with no account verify it, with evidence?</a:t>
+            </a:r>
+          </a:p>
+        </p:txBody>
+      </p:sp>
+      <p:sp>
+        <p:nvSpPr>
+          <p:cNvPr id="7" name="TextBox 6"/>
           <p:cNvSpPr txBox="1"/>
           <p:nvPr/>
         </p:nvSpPr>
         <p:spPr>
           <a:xfrm>
-            <a:off x="548640" y="4526280"/>
+            <a:off x="548640" y="3794760"/>
             <a:ext cx="11091672" cy="1371600"/>
           </a:xfrm>
           <a:prstGeom prst="rect">
@@ -19399,39 +19961,111 @@
           <a:p>
             <a:pPr algn="l">
               <a:lnSpc>
-                <a:spcPct val="103000"/>
+                <a:spcPct val="104000"/>
               </a:lnSpc>
               <a:spcAft>
-                <a:spcPts val="800"/>
+                <a:spcPts val="1000"/>
               </a:spcAft>
             </a:pPr>
             <a:r>
+              <a:rPr sz="1600" b="1" i="0">
+                <a:solidFill>
+                  <a:srgbClr val="1C7293"/>
+                </a:solidFill>
+                <a:latin typeface="Calibri"/>
+              </a:rPr>
+              <a:t>Concretely — </a:t>
+            </a:r>
+            <a:r>
               <a:rPr sz="1600" b="0" i="0">
                 <a:solidFill>
                   <a:srgbClr val="1B2A3A"/>
                 </a:solidFill>
                 <a:latin typeface="Calibri"/>
               </a:rPr>
-              <a:t>•  It needs no login, so it is testable today against any public server.</a:t>
+              <a:t>each check maps to a specific rule: is the traffic encrypted, is the login advertised, is it enforced, is OAuth configured safely.</a:t>
             </a:r>
           </a:p>
           <a:p>
             <a:pPr algn="l">
               <a:lnSpc>
-                <a:spcPct val="103000"/>
+                <a:spcPct val="104000"/>
               </a:lnSpc>
-              <a:spcAft>
-                <a:spcPts val="0"/>
-              </a:spcAft>
             </a:pPr>
             <a:r>
+              <a:rPr sz="1600" b="1" i="0">
+                <a:solidFill>
+                  <a:srgbClr val="1C7293"/>
+                </a:solidFill>
+                <a:latin typeface="Calibri"/>
+              </a:rPr>
+              <a:t>From the outside — </a:t>
+            </a:r>
+            <a:r>
               <a:rPr sz="1600" b="0" i="0">
                 <a:solidFill>
                   <a:srgbClr val="1B2A3A"/>
                 </a:solidFill>
                 <a:latin typeface="Calibri"/>
               </a:rPr>
-              <a:t>•  It measures whether login is advertised and enforced — not whether it is sound.</a:t>
+              <a:t>every check works with no credentials, so it runs today against real public servers.</a:t>
+            </a:r>
+          </a:p>
+        </p:txBody>
+      </p:sp>
+      <p:sp>
+        <p:nvSpPr>
+          <p:cNvPr id="8" name="TextBox 7"/>
+          <p:cNvSpPr txBox="1"/>
+          <p:nvPr/>
+        </p:nvSpPr>
+        <p:spPr>
+          <a:xfrm>
+            <a:off x="548640" y="5349240"/>
+            <a:ext cx="11091672" cy="640080"/>
+          </a:xfrm>
+          <a:prstGeom prst="rect">
+            <a:avLst/>
+          </a:prstGeom>
+          <a:noFill/>
+        </p:spPr>
+        <p:txBody>
+          <a:bodyPr wrap="square" anchor="t" lIns="0" rIns="0" tIns="0" bIns="0">
+            <a:spAutoFit/>
+          </a:bodyPr>
+          <a:lstStyle/>
+          <a:p>
+            <a:pPr algn="l">
+              <a:lnSpc>
+                <a:spcPct val="104000"/>
+              </a:lnSpc>
+            </a:pPr>
+            <a:r>
+              <a:rPr sz="1400" b="0" i="1">
+                <a:solidFill>
+                  <a:srgbClr val="5C6B7A"/>
+                </a:solidFill>
+                <a:latin typeface="Calibri"/>
+              </a:rPr>
+              <a:t>The boundary: we measure what a server </a:t>
+            </a:r>
+            <a:r>
+              <a:rPr sz="1400" b="1" i="1">
+                <a:solidFill>
+                  <a:srgbClr val="12233F"/>
+                </a:solidFill>
+                <a:latin typeface="Calibri"/>
+              </a:rPr>
+              <a:t>advertises and enforces at its front door</a:t>
+            </a:r>
+            <a:r>
+              <a:rPr sz="1400" b="0" i="1">
+                <a:solidFill>
+                  <a:srgbClr val="5C6B7A"/>
+                </a:solidFill>
+                <a:latin typeface="Calibri"/>
+              </a:rPr>
+              <a:t> — not whether the login is sound once you are through it.</a:t>
             </a:r>
           </a:p>
         </p:txBody>
@@ -20038,7 +20672,7 @@
                 </a:solidFill>
                 <a:latin typeface="Calibri"/>
               </a:rPr>
-              <a:t>plus the reading half of step 2.</a:t>
+              <a:t>and the read-only half of step 2.</a:t>
             </a:r>
           </a:p>
           <a:p>
@@ -20778,8 +21412,8 @@
         </p:nvSpPr>
         <p:spPr>
           <a:xfrm>
-            <a:off x="548640" y="3566160"/>
-            <a:ext cx="11091672" cy="2103120"/>
+            <a:off x="548640" y="3291840"/>
+            <a:ext cx="11091672" cy="2651760"/>
           </a:xfrm>
           <a:prstGeom prst="rect">
             <a:avLst/>
@@ -20797,17 +21431,17 @@
                 <a:spcPct val="103000"/>
               </a:lnSpc>
               <a:spcAft>
-                <a:spcPts val="1000"/>
+                <a:spcPts val="800"/>
               </a:spcAft>
             </a:pPr>
             <a:r>
-              <a:rPr sz="1500" b="0" i="0">
+              <a:rPr sz="1400" b="0" i="0">
                 <a:solidFill>
                   <a:srgbClr val="1B2A3A"/>
                 </a:solidFill>
                 <a:latin typeface="Calibri"/>
               </a:rPr>
-              <a:t>•  Handshake: the opening MCP exchange. The server may hand back a session id — a temporary “same conversation” label, not a password. We replay it so a server that merely wants one is not mistaken for secured.</a:t>
+              <a:t>•  Validate the target: confirm the URL is well-formed and safe to contact — the containment check (slide 9) — before any traffic is sent.</a:t>
             </a:r>
           </a:p>
           <a:p>
@@ -20816,11 +21450,30 @@
                 <a:spcPct val="103000"/>
               </a:lnSpc>
               <a:spcAft>
-                <a:spcPts val="1000"/>
+                <a:spcPts val="800"/>
               </a:spcAft>
             </a:pPr>
             <a:r>
-              <a:rPr sz="1500" b="0" i="0">
+              <a:rPr sz="1400" b="0" i="0">
+                <a:solidFill>
+                  <a:srgbClr val="1B2A3A"/>
+                </a:solidFill>
+                <a:latin typeface="Calibri"/>
+              </a:rPr>
+              <a:t>•  Handshake: the opening MCP “initialize” exchange. The server may hand back a session id — a temporary “same conversation” label, not a password. We replay it so a server that merely wants one is not mistaken for secured.</a:t>
+            </a:r>
+          </a:p>
+          <a:p>
+            <a:pPr algn="l">
+              <a:lnSpc>
+                <a:spcPct val="103000"/>
+              </a:lnSpc>
+              <a:spcAft>
+                <a:spcPts val="800"/>
+              </a:spcAft>
+            </a:pPr>
+            <a:r>
+              <a:rPr sz="1400" b="0" i="0">
                 <a:solidFill>
                   <a:srgbClr val="1B2A3A"/>
                 </a:solidFill>
@@ -20839,7 +21492,7 @@
               </a:spcAft>
             </a:pPr>
             <a:r>
-              <a:rPr sz="1500" b="0" i="0">
+              <a:rPr sz="1400" b="0" i="0">
                 <a:solidFill>
                   <a:srgbClr val="1B2A3A"/>
                 </a:solidFill>
@@ -21608,7 +22261,7 @@
           <a:p>
             <a:pPr algn="l">
               <a:lnSpc>
-                <a:spcPct val="105000"/>
+                <a:spcPct val="104000"/>
               </a:lnSpc>
               <a:spcAft>
                 <a:spcPts val="1000"/>
@@ -21621,13 +22274,13 @@
                 </a:solidFill>
                 <a:latin typeface="Calibri"/>
               </a:rPr>
-              <a:t>INCONCLUSIVE is a real result.</a:t>
+              <a:t>INCONCLUSIVE is a real result — not a failure.</a:t>
             </a:r>
           </a:p>
           <a:p>
             <a:pPr algn="l">
               <a:lnSpc>
-                <a:spcPct val="105000"/>
+                <a:spcPct val="104000"/>
               </a:lnSpc>
               <a:spcAft>
                 <a:spcPts val="1000"/>
@@ -21640,23 +22293,41 @@
                 </a:solidFill>
                 <a:latin typeface="Calibri"/>
               </a:rPr>
-              <a:t>A tool that only ever says “vulnerable” or “fine” hides its own uncertainty.</a:t>
+              <a:t>We refuse to guess: when a reply doesn't let us decide, saying so beats a false pass or a false alarm.</a:t>
             </a:r>
           </a:p>
           <a:p>
             <a:pPr algn="l">
               <a:lnSpc>
-                <a:spcPct val="105000"/>
+                <a:spcPct val="104000"/>
               </a:lnSpc>
             </a:pPr>
             <a:r>
-              <a:rPr sz="1400" b="0" i="0">
+              <a:rPr sz="1350" b="0" i="0">
                 <a:solidFill>
                   <a:srgbClr val="1B2A3A"/>
                 </a:solidFill>
                 <a:latin typeface="Calibri"/>
               </a:rPr>
-              <a:t>Example: a firewall's blanket “403 forbidden” once looked like “login enforced”, so a blocked scan was graded secure. An unconfirmable refusal is now INCONCLUSIVE instead.</a:t>
+              <a:t>Example — check #14 asks the login server to send the user back to an </a:t>
+            </a:r>
+            <a:r>
+              <a:rPr sz="1350" b="0" i="1">
+                <a:solidFill>
+                  <a:srgbClr val="1B2A3A"/>
+                </a:solidFill>
+                <a:latin typeface="Calibri"/>
+              </a:rPr>
+              <a:t>unregistered</a:t>
+            </a:r>
+            <a:r>
+              <a:rPr sz="1350" b="0" i="0">
+                <a:solidFill>
+                  <a:srgbClr val="1B2A3A"/>
+                </a:solidFill>
+                <a:latin typeface="Calibri"/>
+              </a:rPr>
+              <a:t> address. A correct server refuses; a broken one obeys. But many just answer 200 with a login page — and since we never log in, we can't see which way it resolves. Not a pass, not a gap: INCONCLUSIVE.</a:t>
             </a:r>
           </a:p>
         </p:txBody>
@@ -22051,7 +22722,7 @@
                 </a:solidFill>
                 <a:latin typeface="Calibri"/>
               </a:rPr>
-              <a:t>Secrets in a reply are replaced with a placeholder before anything is written to disk — the field name stays, because “a secret was issued” is itself evidence.</a:t>
+              <a:t>When a reply contains a secret — a token or client secret — we blank its value before writing to disk (client_secret: &lt;redacted&gt;), but keep the field name so the evidence still shows what the server returned.</a:t>
             </a:r>
           </a:p>
         </p:txBody>
@@ -22186,7 +22857,7 @@
                 </a:solidFill>
                 <a:latin typeface="Calibri"/>
               </a:rPr>
-              <a:t>Almost every address the scanner visits after the first is chosen by the server being scanned — where to log in, where to register. Following them blindly would turn the scanner into someone else's weapon.</a:t>
+              <a:t>After the first request, almost every address the scanner visits is one the scanned server chose — where to log in, where to register. If we followed those blindly, a malicious server could aim our scanner at a victim of its choosing, and our tool would do the hitting for it.</a:t>
             </a:r>
           </a:p>
         </p:txBody>
@@ -22199,7 +22870,7 @@
         </p:nvSpPr>
         <p:spPr>
           <a:xfrm>
-            <a:off x="548640" y="2926080"/>
+            <a:off x="548640" y="3063240"/>
             <a:ext cx="6126480" cy="1371600"/>
           </a:xfrm>
           <a:prstGeom prst="rect">
@@ -22218,7 +22889,7 @@
                 <a:spcPct val="103000"/>
               </a:lnSpc>
               <a:spcAft>
-                <a:spcPts val="800"/>
+                <a:spcPts val="1000"/>
               </a:spcAft>
             </a:pPr>
             <a:r>
@@ -22247,7 +22918,7 @@
                 </a:solidFill>
                 <a:latin typeface="Calibri"/>
               </a:rPr>
-              <a:t>•  The one write may reach only the scan target or a sibling under the same domain.</a:t>
+              <a:t>•  The only writes we make (registering a client) may reach the scanned server itself or a sibling on the same registered domain — never an unrelated third party.</a:t>
             </a:r>
           </a:p>
         </p:txBody>
@@ -22260,8 +22931,8 @@
         </p:nvSpPr>
         <p:spPr>
           <a:xfrm>
-            <a:off x="548640" y="4572000"/>
-            <a:ext cx="6126480" cy="1371600"/>
+            <a:off x="548640" y="4709160"/>
+            <a:ext cx="6126480" cy="1280160"/>
           </a:xfrm>
           <a:prstGeom prst="roundRect">
             <a:avLst>
@@ -22308,8 +22979,8 @@
         </p:nvSpPr>
         <p:spPr>
           <a:xfrm>
-            <a:off x="777240" y="4709160"/>
-            <a:ext cx="5669280" cy="1143000"/>
+            <a:off x="777240" y="4828032"/>
+            <a:ext cx="5669280" cy="1051560"/>
           </a:xfrm>
           <a:prstGeom prst="rect">
             <a:avLst/>
@@ -22334,7 +23005,7 @@
                 </a:solidFill>
                 <a:latin typeface="Calibri"/>
               </a:rPr>
-              <a:t>Real incident: while scanning api.serff.ai, an early version registered a client on api.llow.io — a different company, never on our list. Its metadata named that address and the scanner obeyed. Containment was added afterwards; it has since blocked one such write (to login.semgrep.dev).</a:t>
+              <a:t>Real incident: while scanning api.serff.ai, an early version followed that server's own metadata to a registration endpoint on api.llow.io — a different company we never listed — and registered a client there. We added containment in response; it has since blocked one such cross-domain write (to login.semgrep.dev).</a:t>
             </a:r>
           </a:p>
         </p:txBody>

--- a/MCP-auth-slides.pptx
+++ b/MCP-auth-slides.pptx
@@ -600,7 +600,7 @@
           <a:lstStyle/>
           <a:p>
             <a:r>
-              <a:t>This slide introduces the checks so later references resolve, and the Rule column is the point: every check is anchored to a MUST or SHOULD in the spec (only #8 CORS is non-MCP). Don't read all 14 — say the grouping: whether a stranger can reach the tools (1, 13), transport safety (2, 5), discovering the login (3, 4, 10), OAuth hygiene in the metadata (9, 11), session and browser defences (6, 7, 8), and the two write checks (12, 14). The next slides explain each group and cite its clause.</a:t>
+              <a:t>This slide introduces the checks so later references resolve, and the Rule column is the point: every check is anchored to a MUST or SHOULD in the spec (only #8 CORS is non-MCP). Don't read all 14 - say the grouping: whether a stranger can reach the tools (1, 13), transport safety (2, 5), discovering the login (3, 4, 10), OAuth hygiene in the metadata (9, 11), session and browser defences (6, 7, 8), and the two write checks (12, 14). The next slides explain each group and cite its clause.</a:t>
             </a:r>
           </a:p>
         </p:txBody>
@@ -740,7 +740,7 @@
           <a:lstStyle/>
           <a:p>
             <a:r>
-              <a:t>Pure transport hygiene now that #3 has moved to discovery. #2 actually connects and checks the certificate — 'the URL says https' is not 'TLS works'. #5 is tied to the session era (2025-03-26 to 2025-11-25) and is inconclusive on most servers because we don't implement the deprecated two-connection transport it needs — be ready to say that.</a:t>
+              <a:t>Pure transport hygiene now that #3 has moved to discovery. #2 actually connects and checks the certificate - 'the URL says https' is not 'TLS works'. #5 is tied to the session era (2025-03-26 to 2025-11-25) and is inconclusive on most servers because we don't implement the deprecated two-connection transport it needs - be ready to say that.</a:t>
             </a:r>
           </a:p>
         </p:txBody>
@@ -880,7 +880,7 @@
           <a:lstStyle/>
           <a:p>
             <a:r>
-              <a:t>#6: explain 'length isn't entropy' — keyspace = length times alphabet size. #7: the control request is the clever bit — a 403 alone proves nothing; only a server that accepts the control and rejects the forged Origin is really validating. Be upfront that Origin validation is largely ceremonial for a remote https server. #8: our weakest check, kept because it costs one request and is clearly labelled non-MCP.</a:t>
+              <a:t>#6: explain 'length isn't entropy' - keyspace = length times alphabet size. #7: the control request is the clever bit - a 403 alone proves nothing; only a server that accepts the control and rejects the forged Origin is really validating. Be upfront that Origin validation is largely ceremonial for a remote https server. #8: our weakest check, kept because it costs one request and is clearly labelled non-MCP.</a:t>
             </a:r>
           </a:p>
         </p:txBody>
@@ -950,7 +950,7 @@
           <a:lstStyle/>
           <a:p>
             <a:r>
-              <a:t>These two are pure reads of the discovered metadata — a good illustration of the 'fetch once, read many' design. #11's subtlety: OAuth response types are space-delimited sets, so 'id_token token' includes 'token' (the hybrid flow); a naive membership test missed it. If the login server's metadata was declared untrustworthy (#10), #9 and #11 do not read it either.</a:t>
+              <a:t>These two are pure reads of the discovered metadata - a good illustration of the 'fetch once, read many' design. #11's subtlety: OAuth response types are space-delimited sets, so 'id_token token' includes 'token' (the hybrid flow); a naive membership test missed it. If the login server's metadata was declared untrustworthy (#10), #9 and #11 do not read it either.</a:t>
             </a:r>
           </a:p>
         </p:txBody>
@@ -1020,7 +1020,7 @@
           <a:lstStyle/>
           <a:p>
             <a:r>
-              <a:t>These are the only two write checks. #12 registers a client; #14 must register one to have something whose redirect rules it can test. Both are off by default and journalled before cleanup. The cost of running them, and what #14 found, come in the results and ethics sections — don't pre-empt the numbers here.</a:t>
+              <a:t>These are the only two write checks. #12 registers a client; #14 must register one to have something whose redirect rules it can test. Both are off by default and journalled before cleanup. The cost of running them, and what #14 found, come in the results and ethics sections - don't pre-empt the numbers here.</a:t>
             </a:r>
           </a:p>
         </p:txBody>
@@ -1090,7 +1090,7 @@
           <a:lstStyle/>
           <a:p>
             <a:r>
-              <a:t>Emphasise: one consistent run — every number that follows comes from the same scan on the same day, directly comparable. No ERROR verdicts because we removed five endpoints that had gone dead since earlier runs. Name the two populations clearly: the 83 real public servers we MEASURE (from the MCP Registry) versus the 7 local practice servers we BUILT to test the tool (detailed at slide 23). Be first to say 83 is a thin slice of the registry, not internet-wide rates.</a:t>
+              <a:t>Emphasise: one consistent run - every number that follows comes from the same scan on the same day, directly comparable. No ERROR verdicts because we removed five endpoints that had gone dead since earlier runs. Name the two populations clearly: the 83 real public servers we MEASURE (from the MCP Registry) versus the 7 local practice servers we BUILT to test the tool (detailed at slide 23). Be first to say 83 is a thin slice of the registry, not internet-wide rates.</a:t>
             </a:r>
           </a:p>
         </p:txBody>
@@ -1160,7 +1160,7 @@
           <a:lstStyle/>
           <a:p>
             <a:r>
-              <a:t>Walk only the highlights (#1=28, open-dcr=38, #13=22). If asked about #4/#10 precision: hf.co answers a redirect we grade as 'absent' though its target is a valid document, so those two counts are each at least one high — worth conceding if an examiner clicks a link. The three following slides zoom into the findings that matter.</a:t>
+              <a:t>Walk only the highlights (#1=28, open-dcr=38, #13=22). If asked about #4/#10 precision: hf.co answers a redirect we grade as 'absent' though its target is a valid document, so those two counts are each at least one high - worth conceding if an examiner clicks a link. The three following slides zoom into the findings that matter.</a:t>
             </a:r>
           </a:p>
         </p:txBody>
@@ -1230,7 +1230,7 @@
           <a:lstStyle/>
           <a:p>
             <a:r>
-              <a:t>Be precise: this proves the catalogue is readable without login — capability disclosure. It does NOT by itself prove you can run the tools; the next slide settles that. The open ones cluster among lesser-known entries; recognisable vendors all gate. Disclosure is the reconnaissance step.</a:t>
+              <a:t>Be precise: this proves the catalogue is readable without login - capability disclosure. It does NOT by itself prove you can run the tools; the next slide settles that. The open ones cluster among lesser-known entries; recognisable vendors all gate. Disclosure is the reconnaissance step.</a:t>
             </a:r>
           </a:p>
         </p:txBody>
@@ -1300,7 +1300,7 @@
           <a:lstStyle/>
           <a:p>
             <a:r>
-              <a:t>The professor knows HTTP but not MCP. Frame it: an MCP server is a small web API exposing a menu of actions to an AI; the protocol standardises the menu and the messages but leaves security — requiring a login (authentication) and enforcing what a caller may do (authorization) — to the implementer. JSON-RPC = calling a named method with parameters and getting a result or error; MCP uses initialize, tools/list, tools/call.</a:t>
+              <a:t>The professor knows HTTP but not MCP. Frame it: an MCP server is a small web API exposing a menu of actions to an AI; the protocol standardises the menu and the messages but leaves security - requiring a login (authentication) and enforcing what a caller may do (authorization) - to the implementer. JSON-RPC = calling a named method with parameters and getting a result or error; MCP uses initialize, tools/list, tools/call.</a:t>
             </a:r>
           </a:p>
         </p:txBody>
@@ -1370,7 +1370,7 @@
           <a:lstStyle/>
           <a:p>
             <a:r>
-              <a:t>The result to be proud of. Six of the 28 disclose their catalogue but return 401 on tools/call. Show the dock evidence. If asked why a reply proves 'past the gate' for tools/call but a 200 does not for #14: different endpoints — tools/call is a JSON-RPC method (any reply = past the transport gate), while #14's /authorize is a browser page where a 200 is just a login form.</a:t>
+              <a:t>The result to be proud of. Six of the 28 disclose their catalogue but return 401 on tools/call. Show the dock evidence. If asked why a reply proves 'past the gate' for tools/call but a 200 does not for #14: different endpoints - tools/call is a JSON-RPC method (any reply = past the transport gate), while #14's /authorize is a browser page where a 200 is just a login form.</a:t>
             </a:r>
           </a:p>
         </p:txBody>
@@ -1440,7 +1440,7 @@
           <a:lstStyle/>
           <a:p>
             <a:r>
-              <a:t>Strengthen the importance. DCR normally means a developer registers an app once by hand; open DCR automates it for anyone. Walk the 3-step attack chain aloud: register a plausible client, lure a user into approving it, receive tokens issued for that user. It is the foothold the MCP spec's own security section warns about, and the only piece of the identity-confusion risk observable without a token — which is why it earns a finding even though it breaks no rule. The write cost of running this and #14 is the next slide.</a:t>
+              <a:t>Strengthen the importance. DCR normally means a developer registers an app once by hand; open DCR automates it for anyone. Walk the 3-step attack chain aloud: register a plausible client, lure a user into approving it, receive tokens issued for that user. It is the foothold the MCP spec's own security section warns about, and the only piece of the identity-confusion risk observable without a token - which is why it earns a finding even though it breaks no rule. The write cost of running this and #14 is the next slide.</a:t>
             </a:r>
           </a:p>
         </p:txBody>
@@ -1510,7 +1510,7 @@
           <a:lstStyle/>
           <a:p>
             <a:r>
-              <a:t>The insight, not the litter: only servers running a real OAuth flow were testable, and none of them mishandled the redirect address (23 confirmed reject, 24 behind a login wall). Security features travel together — the servers mature enough to support DCR + auth-code also validated redirect URIs, foreshadowing 'security tracks maturity' on the closing slide. Cost backup if asked: running the two write checks left 76 client registrations we couldn't delete (38 + 38); all inert, self-expiring, and journalled before any delete attempt. If asked why 200 isn't a finding for #14: the /authorize 200 is just a login form; the dangerous event is a redirect to the attacker's address, which we never saw.</a:t>
+              <a:t>The insight, not the litter: only servers running a real OAuth flow were testable, and none of them mishandled the redirect address (23 confirmed reject, 24 behind a login wall). Security features travel together - the servers mature enough to support DCR + auth-code also validated redirect URIs, foreshadowing 'security tracks maturity' on the closing slide. Cost backup if asked: running the two write checks left 76 client registrations we couldn't delete (38 + 38); all inert, self-expiring, and journalled before any delete attempt. If asked why 200 isn't a finding for #14: the /authorize 200 is just a login form; the dangerous event is a redirect to the attacker's address, which we never saw.</a:t>
             </a:r>
           </a:p>
         </p:txBody>
@@ -1650,7 +1650,7 @@
           <a:lstStyle/>
           <a:p>
             <a:r>
-              <a:t>Say the caveat sentence slowly — it is the single most important sentence in the talk. The two-hop picture explains WHY the deeper gaps are out of reach: the MCP server is a middleman in front of a true back-end, and the dangerous auth mistakes happen on that hop, invisible from outside even with a token. PKCE = a proof that the app finishing a login started it; we can't observe it without completing a login.</a:t>
+              <a:t>Say the caveat sentence slowly - it is the single most important sentence in the talk. The two-hop picture explains WHY the deeper gaps are out of reach: the MCP server is a middleman in front of a true back-end, and the dangerous auth mistakes happen on that hop, invisible from outside even with a token. PKCE = a proof that the app finishing a login started it; we can't observe it without completing a login.</a:t>
             </a:r>
           </a:p>
         </p:txBody>
@@ -1720,7 +1720,7 @@
           <a:lstStyle/>
           <a:p>
             <a:r>
-              <a:t>Key nuance the professor will want: servers self-report their revision in the initialize handshake, and the installed base lags — plenty still run 2025-03-26 or 2024-11-05, so checks tied to older rules (sessions: #5, #6) still describe real servers we scanned. A newer spec does not retroactively fix an older server. Present the changes as context, not as failure.</a:t>
+              <a:t>Key nuance the professor will want: servers self-report their revision in the initialize handshake, and the installed base lags - plenty still run 2025-03-26 or 2024-11-05, so checks tied to older rules (sessions: #5, #6) still describe real servers we scanned. A newer spec does not retroactively fix an older server. Present the changes as context, not as failure.</a:t>
             </a:r>
           </a:p>
         </p:txBody>
@@ -1790,7 +1790,7 @@
           <a:lstStyle/>
           <a:p>
             <a:r>
-              <a:t>Direction A. Lead with the thesis sentence, slowly. Then the WHY, straight from our proposal: the MCP spec marks authorization OPTIONAL, Anthropic's own quick-start and most YouTube/Google guides stand up a fastMCP server in 2–5 minutes with auth off, and only mention it later as an optional feature — so servers shipping without auth is the predictable default, not a surprise. Then WHAT we found (the maturity gradient) and WHAT we built (a reproducible, evidence-backed instrument). Close on the kicker line, then invite questions.</a:t>
+              <a:t>Direction A. Lead with the thesis sentence, slowly. Then the WHY, straight from our proposal: the MCP spec marks authorization OPTIONAL, Anthropic's own quick-start and most YouTube/Google guides stand up a fastMCP server in 2–5 minutes with auth off, and only mention it later as an optional feature - so servers shipping without auth is the predictable default, not a surprise. Then WHAT we found (the maturity gradient) and WHAT we built (a reproducible, evidence-backed instrument). Close on the kicker line, then invite questions.</a:t>
             </a:r>
           </a:p>
         </p:txBody>
@@ -1860,7 +1860,7 @@
           <a:lstStyle/>
           <a:p>
             <a:r>
-              <a:t>Backup slide — jump here if the question arises; otherwise skip.</a:t>
+              <a:t>Backup slide - jump here if the question arises; otherwise skip.</a:t>
             </a:r>
           </a:p>
         </p:txBody>
@@ -1930,7 +1930,7 @@
           <a:lstStyle/>
           <a:p>
             <a:r>
-              <a:t>Backup slide — jump here if the question arises; otherwise skip.</a:t>
+              <a:t>Backup slide - jump here if the question arises; otherwise skip.</a:t>
             </a:r>
           </a:p>
         </p:txBody>
@@ -2000,7 +2000,7 @@
           <a:lstStyle/>
           <a:p>
             <a:r>
-              <a:t>Backup slide — jump here if the question arises; otherwise skip.</a:t>
+              <a:t>Backup slide - jump here if the question arises; otherwise skip.</a:t>
             </a:r>
           </a:p>
         </p:txBody>
@@ -2070,7 +2070,7 @@
           <a:lstStyle/>
           <a:p>
             <a:r>
-              <a:t>MCP adopted OAuth 2.1 and wrote rules for how servers must use it. Stress the split: MCP server and login server are often different companies — that's why finding the login later takes two pages. A token is bearer. Why OAuth not passwords: the app never sees your password; the auth server does the login and returns a scoped, revocable token.</a:t>
+              <a:t>MCP adopted OAuth 2.1 and wrote rules for how servers must use it. Stress the split: MCP server and login server are often different companies - that's why finding the login later takes two pages. A token is bearer. Why OAuth not passwords: the app never sees your password; the auth server does the login and returns a scoped, revocable token.</a:t>
             </a:r>
           </a:p>
         </p:txBody>
@@ -2140,7 +2140,7 @@
           <a:lstStyle/>
           <a:p>
             <a:r>
-              <a:t>Three angles were considered; this one is meaningful AND runnable without accounts on 83 services. The question spans the whole authorization surface an outsider can see — transport, discovery (is login advertised), enforcement, and OAuth configuration — the 14 checks introduced next. Stress that 'what a server advertises and enforces at its front door, not whether it is sound behind it' is the single most important caveat, and that you return to it at the end (slide 24). The other two angles — token passthrough and identity confusion — need a real logged-in session and evidence on a back-end we can't see.</a:t>
+              <a:t>Three angles were considered; this one is meaningful AND runnable without accounts on 83 services. The question spans the whole authorization surface an outsider can see - transport, discovery (is login advertised), enforcement, and OAuth configuration - the 14 checks introduced next. Stress that 'what a server advertises and enforces at its front door, not whether it is sound behind it' is the single most important caveat, and that you return to it at the end (slide 24). The other two angles - token passthrough and identity confusion - need a real logged-in session and evidence on a back-end we can't see.</a:t>
             </a:r>
           </a:p>
         </p:txBody>
@@ -2210,7 +2210,7 @@
           <a:lstStyle/>
           <a:p>
             <a:r>
-              <a:t>This is the honest core. We never send anyone to log in, never obtain a token, never reach step 3. Against a wide-open server, step 1 just succeeds — which is exactly what the first check reports. Because we hold nothing, every result is about advertisement and enforcement, not soundness.</a:t>
+              <a:t>This is the honest core. We never send anyone to log in, never obtain a token, never reach step 3. Against a wide-open server, step 1 just succeeds - which is exactly what the first check reports. Because we hold nothing, every result is about advertisement and enforcement, not soundness.</a:t>
             </a:r>
           </a:p>
         </p:txBody>
@@ -2350,7 +2350,7 @@
           <a:lstStyle/>
           <a:p>
             <a:r>
-              <a:t>Emphasise that INCONCLUSIVE is honest, not a failure. The #14 example is the clearest: we register a client, then start a login with a redirect URI that was never registered. A strict server rejects it; a broken one would redirect to it. But a server that answers 200 with a login page is genuinely undecidable from outside — resolving it would require completing the login, which we never do. So INCONCLUSIVE is the correct verdict, not a guess or a cop-out. #14 is introduced in full later (slide 22); here it just illustrates the verdict.</a:t>
+              <a:t>Emphasise that INCONCLUSIVE is honest, not a failure. The #14 example is the clearest: we register a client, then start a login with a redirect URI that was never registered. A strict server rejects it; a broken one would redirect to it. But a server that answers 200 with a login page is genuinely undecidable from outside - resolving it would require completing the login, which we never do. So INCONCLUSIVE is the correct verdict, not a guess or a cop-out. #14 is introduced in full later (slide 22); here it just illustrates the verdict.</a:t>
             </a:r>
           </a:p>
         </p:txBody>
@@ -2490,7 +2490,7 @@
           <a:lstStyle/>
           <a:p>
             <a:r>
-              <a:t>Present this as the strongest safety point: it was a fix, not a precaution. Tell the api.llow.io story — the scanner obeyed a target's metadata and wrote to a different company — then that containment now exists and has fired for real (semgrep). Framing: an SSRF-style risk that our own tool could be turned against third parties it was never meant to touch; we hit it for real and then contained it. (Avoid the term 'confused deputy' on the slide — it collides with the abandoned Tier-3 gap of the same name.)</a:t>
+              <a:t>Present this as the strongest safety point: it was a fix, not a precaution. Tell the api.llow.io story - the scanner obeyed a target's metadata and wrote to a different company - then that containment now exists and has fired for real (semgrep). Framing: an SSRF-style risk that our own tool could be turned against third parties it was never meant to touch; we hit it for real and then contained it. (Avoid the term 'confused deputy' on the slide - it collides with the abandoned Tier-3 gap of the same name.)</a:t>
             </a:r>
           </a:p>
         </p:txBody>
@@ -5608,7 +5608,7 @@
                 </a:solidFill>
                 <a:latin typeface="Calibri"/>
               </a:rPr>
-              <a:t>A scanner that measures a server's login setup from the outside — without ever logging in.</a:t>
+              <a:t>A scanner that measures a server's login setup from the outside - without ever logging in.</a:t>
             </a:r>
           </a:p>
         </p:txBody>
@@ -5707,7 +5707,7 @@
                 </a:solidFill>
                 <a:latin typeface="Calibri"/>
               </a:rPr>
-              <a:t>public MCP servers hand their tool list to a stranger — no login.</a:t>
+              <a:t>public MCP servers hand their tool list to a stranger - no login.</a:t>
             </a:r>
           </a:p>
         </p:txBody>
@@ -7852,7 +7852,7 @@
                 </a:solidFill>
                 <a:latin typeface="Calibri"/>
               </a:rPr>
-              <a:t>no-authentication-remote  —  can a stranger LIST the tools?</a:t>
+              <a:t>no-authentication-remote  -  can a stranger LIST the tools?</a:t>
             </a:r>
             <a:r>
               <a:rPr sz="1200" b="1" i="0">
@@ -7976,7 +7976,7 @@
                 </a:solidFill>
                 <a:latin typeface="Calibri"/>
               </a:rPr>
-              <a:t>unauthenticated-tool-invocation  —  can a stranger RUN one?</a:t>
+              <a:t>unauthenticated-tool-invocation  -  can a stranger RUN one?</a:t>
             </a:r>
             <a:r>
               <a:rPr sz="1200" b="1" i="0">
@@ -8001,7 +8001,7 @@
                 </a:solidFill>
                 <a:latin typeface="Calibri"/>
               </a:rPr>
-              <a:t>Send tools/call for a deliberately non-existent tool, no token — so nothing executes. A 401 means the call path is gated; any JSON-RPC reply means it reached the dispatch layer, i.e. invocation is open.</a:t>
+              <a:t>Send tools/call for a deliberately non-existent tool, no token - so nothing executes. A 401 means the call path is gated; any JSON-RPC reply means it reached the dispatch layer, i.e. invocation is open.</a:t>
             </a:r>
           </a:p>
         </p:txBody>
@@ -8097,7 +8097,7 @@
                 </a:solidFill>
                 <a:latin typeface="Calibri"/>
               </a:rPr>
-              <a:t>reading a menu is not ordering from it. #1 shows the menu is readable by anyone; #13 shows whether a stranger can actually place an order. Plenty of servers hand out the menu but still require a login before they serve — only #13 separates the two.</a:t>
+              <a:t>reading a menu is not ordering from it. #1 shows the menu is readable by anyone; #13 shows whether a stranger can actually place an order. Plenty of servers hand out the menu but still require a login before they serve - only #13 separates the two.</a:t>
             </a:r>
           </a:p>
         </p:txBody>
@@ -8317,7 +8317,7 @@
                 </a:solidFill>
                 <a:latin typeface="Calibri"/>
               </a:rPr>
-              <a:t>Plain http on a public host — or https whose certificate is expired, self-signed, or for the wrong name. Either way the traffic isn't really protected and a token would travel exposed.</a:t>
+              <a:t>Plain http on a public host - or https whose certificate is expired, self-signed, or for the wrong name. Either way the traffic isn't really protected and a token would travel exposed.</a:t>
             </a:r>
           </a:p>
         </p:txBody>
@@ -8441,7 +8441,7 @@
                 </a:solidFill>
                 <a:latin typeface="Calibri"/>
               </a:rPr>
-              <a:t>Is the session tag placed in the web address instead of a header? URLs end up in server logs, browser history and the Referer header — so the tag leaks.</a:t>
+              <a:t>Is the session tag placed in the web address instead of a header? URLs end up in server logs, browser history and the Referer header - so the tag leaks.</a:t>
             </a:r>
           </a:p>
         </p:txBody>
@@ -8726,7 +8726,7 @@
                 </a:solidFill>
                 <a:latin typeface="Calibri"/>
               </a:rPr>
-              <a:t> (#10) — often across different companies.</a:t>
+              <a:t> (#10) - often across different companies.</a:t>
             </a:r>
           </a:p>
         </p:txBody>
@@ -8850,7 +8850,7 @@
                 </a:solidFill>
                 <a:latin typeface="Calibri"/>
               </a:rPr>
-              <a:t>When a server correctly refuses with 401 “log in first”, it must also say WHERE — a WWW-Authenticate header pointing at its login-info page. Many just say “no” and leave the client stuck with nowhere to go.</a:t>
+              <a:t>When a server correctly refuses with 401 “log in first”, it must also say WHERE - a WWW-Authenticate header pointing at its login-info page. Many just say “no” and leave the client stuck with nowhere to go.</a:t>
             </a:r>
           </a:p>
         </p:txBody>
@@ -8974,7 +8974,7 @@
                 </a:solidFill>
                 <a:latin typeface="Calibri"/>
               </a:rPr>
-              <a:t>Does the MCP server publish the page naming its login server? Without it a client can't find where to authenticate. We query the exact spec address (a well-known path inserted before the server's path), not the bare domain — or we'd falsely accuse servers hosted under a path.</a:t>
+              <a:t>Does the MCP server publish the page naming its login server? Without it a client can't find where to authenticate. We query the exact spec address (a well-known path inserted before the server's path), not the bare domain - or we'd falsely accuse servers hosted under a path.</a:t>
             </a:r>
           </a:p>
         </p:txBody>
@@ -9133,7 +9133,7 @@
                 </a:solidFill>
                 <a:latin typeface="Calibri"/>
               </a:rPr>
-              <a:t>These share one lookup, fetched once at the start — so #4, #9, #10, #11 and #14 all reason about the same copy.</a:t>
+              <a:t>These share one lookup, fetched once at the start - so #4, #9, #10, #11 and #14 all reason about the same copy.</a:t>
             </a:r>
           </a:p>
         </p:txBody>
@@ -9353,7 +9353,7 @@
                 </a:solidFill>
                 <a:latin typeface="Calibri"/>
               </a:rPr>
-              <a:t>Open several sessions and compare the tags. Counting up, identical, or too little randomness = guessable. Key idea: length is not entropy — a 15-char random token beats a 16-digit counter.</a:t>
+              <a:t>Open several sessions and compare the tags. Counting up, identical, or too little randomness = guessable. Key idea: length is not entropy - a 15-char random token beats a 16-digit counter.</a:t>
             </a:r>
           </a:p>
         </p:txBody>
@@ -9477,7 +9477,7 @@
                 </a:solidFill>
                 <a:latin typeface="Calibri"/>
               </a:rPr>
-              <a:t>Send a request with a forged Origin. A refusal only counts if a no-Origin control is accepted — otherwise the server just refuses everything. Guards against DNS-rebinding, mainly a threat to local servers.</a:t>
+              <a:t>Send a request with a forged Origin. A refusal only counts if a no-Origin control is accepted - otherwise the server just refuses everything. Guards against DNS-rebinding, mainly a threat to local servers.</a:t>
             </a:r>
           </a:p>
         </p:txBody>
@@ -9601,7 +9601,7 @@
                 </a:solidFill>
                 <a:latin typeface="Calibri"/>
               </a:rPr>
-              <a:t>Does it tell browsers “any website may call me” and “you may send credentials”? Not an MCP rule — reported as general web security, and only relevant if a browser is involved.</a:t>
+              <a:t>Does it tell browsers “any website may call me” and “you may send credentials”? Not an MCP rule - reported as general web security, and only relevant if a browser is involved.</a:t>
             </a:r>
           </a:p>
         </p:txBody>
@@ -9821,7 +9821,7 @@
                 </a:solidFill>
                 <a:latin typeface="Calibri"/>
               </a:rPr>
-              <a:t>Among the login addresses the server publishes, is any on plain http on a public host? Tokens would travel in the clear. Reads the shared lookup — it makes no request of its own.</a:t>
+              <a:t>Among the login addresses the server publishes, is any on plain http on a public host? Tokens would travel in the clear. Reads the shared lookup - it makes no request of its own.</a:t>
             </a:r>
           </a:p>
         </p:txBody>
@@ -10041,7 +10041,7 @@
                 </a:solidFill>
                 <a:latin typeface="Calibri"/>
               </a:rPr>
-              <a:t>These two catch that in what the server advertises about its own login — before a client ever sends a token. Subtlety in #11: the login server lists its supported modes as one space-separated value, so we parse that list rather than string-match it — that way a combined “id_token token” is still flagged as offering the leaky implicit flow, which a naive check would miss.</a:t>
+              <a:t>These two catch that in what the server advertises about its own login - before a client ever sends a token. Subtlety in #11: the login server lists its supported modes as one space-separated value, so we parse that list rather than string-match it - that way a combined “id_token token” is still flagged as offering the leaky implicit flow, which a naive check would miss.</a:t>
             </a:r>
           </a:p>
         </p:txBody>
@@ -10137,7 +10137,7 @@
                 </a:solidFill>
                 <a:latin typeface="Calibri"/>
               </a:rPr>
-              <a:t>The two checks that write — off by default (#12, #14)</a:t>
+              <a:t>The two checks that write - off by default (#12, #14)</a:t>
             </a:r>
           </a:p>
         </p:txBody>
@@ -10261,7 +10261,7 @@
                 </a:solidFill>
                 <a:latin typeface="Calibri"/>
               </a:rPr>
-              <a:t>Dynamic Client Registration (DCR) lets an app sign itself up with the login server, no human involved. #12 sends a real registration to ask: will the server hand out client credentials to anyone, with no review or vetting? Permitted by the rules, so reported as posture — but it is the foothold a bigger attack needs.</a:t>
+              <a:t>Dynamic Client Registration (DCR) lets an app sign itself up with the login server, no human involved. #12 sends a real registration to ask: will the server hand out client credentials to anyone, with no review or vetting? Permitted by the rules, so reported as posture - but it is the foothold a bigger attack needs.</a:t>
             </a:r>
           </a:p>
         </p:txBody>
@@ -10385,7 +10385,7 @@
                 </a:solidFill>
                 <a:latin typeface="Calibri"/>
               </a:rPr>
-              <a:t>After login, the server returns the user to a registered address carrying the login code. Does it accept an address the client never registered? If so, an attacker can steal the code. Needs a registered client first — so it also writes.</a:t>
+              <a:t>After login, the server returns the user to a registered address carrying the login code. Does it accept an address the client never registered? If so, an attacker can steal the code. Needs a registered client first - so it also writes.</a:t>
             </a:r>
           </a:p>
         </p:txBody>
@@ -10607,7 +10607,7 @@
                 </a:solidFill>
                 <a:latin typeface="Calibri"/>
               </a:rPr>
-              <a:t>One consistent scan per server on 2026-09-27 — one pass, all 14 checks, zero ERROR verdicts. Servers came from the official MCP Registry; the raw request/response for every server is committed.</a:t>
+              <a:t>One consistent scan per server on 2026-09-27 - one pass, all 14 checks, zero ERROR verdicts. Servers came from the official MCP Registry; the raw request/response for every server is committed.</a:t>
             </a:r>
           </a:p>
         </p:txBody>
@@ -11000,7 +11000,7 @@
                 </a:solidFill>
                 <a:latin typeface="Calibri"/>
               </a:rPr>
-              <a:t>These 83 are real, public servers from the official MCP Registry — a public directory of live MCP servers. Separately, we built 7 local practice servers to develop and validate the scanner itself (slide 23).</a:t>
+              <a:t>These 83 are real, public servers from the official MCP Registry - a public directory of live MCP servers. Separately, we built 7 local practice servers to develop and validate the scanner itself (slide 23).</a:t>
             </a:r>
           </a:p>
         </p:txBody>
@@ -13534,7 +13534,7 @@
                 </a:solidFill>
                 <a:latin typeface="Calibri"/>
               </a:rPr>
-              <a:t> — authenticating is only a SHOULD. What's notable is that nothing stops a stranger asking what a server can do.</a:t>
+              <a:t> - authenticating is only a SHOULD. What's notable is that nothing stops a stranger asking what a server can do.</a:t>
             </a:r>
           </a:p>
         </p:txBody>
@@ -13678,7 +13678,7 @@
                 </a:solidFill>
                 <a:latin typeface="Calibri"/>
               </a:rPr>
-              <a:t>MCP servers give an AI tools — and ship with no security</a:t>
+              <a:t>MCP servers give an AI tools - and ship with no security</a:t>
             </a:r>
           </a:p>
         </p:txBody>
@@ -13806,7 +13806,7 @@
                 </a:solidFill>
                 <a:latin typeface="Calibri"/>
               </a:rPr>
-              <a:t>•  Nothing forces a server to require a login, or to check what a caller may do — both are left to the implementer to enforce.</a:t>
+              <a:t>•  Nothing forces a server to require a login, or to check what a caller may do - both are left to the implementer to enforce.</a:t>
             </a:r>
           </a:p>
         </p:txBody>
@@ -14314,7 +14314,7 @@
                 </a:solidFill>
                 <a:latin typeface="Calibri"/>
               </a:rPr>
-              <a:t>Check #13 tested the invocation path directly on those 28 servers — and it changed the picture.</a:t>
+              <a:t>Check #13 tested the invocation path directly on those 28 servers - and it changed the picture.</a:t>
             </a:r>
           </a:p>
         </p:txBody>
@@ -14692,7 +14692,7 @@
                 </a:solidFill>
                 <a:latin typeface="Calibri"/>
               </a:rPr>
-              <a:t>The measured figure is 22, not 28. Claiming “anyone can use” on all 28 would have over-stated by about a fifth — #13 replaces that inference with a direct measurement.</a:t>
+              <a:t>The measured figure is 22, not 28. Claiming “anyone can use” on all 28 would have over-stated by about a fifth - #13 replaces that inference with a direct measurement.</a:t>
             </a:r>
           </a:p>
         </p:txBody>
@@ -14782,7 +14782,7 @@
                 </a:solidFill>
                 <a:latin typeface="Courier New"/>
               </a:rPr>
-              <a:t>dock  —  evidence</a:t>
+              <a:t>dock  -  evidence</a:t>
             </a:r>
           </a:p>
           <a:p>
@@ -15075,7 +15075,7 @@
                 </a:solidFill>
                 <a:latin typeface="Calibri"/>
               </a:rPr>
-              <a:t>register a client — no approval</a:t>
+              <a:t>register a client - no approval</a:t>
             </a:r>
           </a:p>
         </p:txBody>
@@ -15229,7 +15229,7 @@
                 </a:solidFill>
                 <a:latin typeface="Calibri"/>
               </a:rPr>
-              <a:t>a legitimate-looking client — no vetting.</a:t>
+              <a:t>a legitimate-looking client - no vetting.</a:t>
             </a:r>
           </a:p>
         </p:txBody>
@@ -15625,7 +15625,7 @@
                 </a:solidFill>
                 <a:latin typeface="Calibri"/>
               </a:rPr>
-              <a:t>Open registration breaks no rule — the spec permits it. But the spec itself flags it as the prerequisite for consent-phishing and client-impersonation attacks, and it is the one piece of the identity-confusion risk visible without any token. That is why we report it as posture, not a pass. (Of the rest: 35 advertise no registration at all; 10 were inconclusive.)</a:t>
+              <a:t>Open registration breaks no rule - the spec permits it. But the spec itself flags it as the prerequisite for consent-phishing and client-impersonation attacks, and it is the one piece of the identity-confusion risk visible without any token. That is why we report it as posture, not a pass. (Of the rest: 35 advertise no registration at all; 10 were inconclusive.)</a:t>
             </a:r>
           </a:p>
         </p:txBody>
@@ -15721,7 +15721,7 @@
                 </a:solidFill>
                 <a:latin typeface="Calibri"/>
               </a:rPr>
-              <a:t>Finding 4: the write check that found nothing — and what that tells us</a:t>
+              <a:t>Finding 4: the write check that found nothing - and what that tells us</a:t>
             </a:r>
           </a:p>
         </p:txBody>
@@ -15914,7 +15914,7 @@
                 </a:solidFill>
                 <a:latin typeface="Calibri"/>
               </a:rPr>
-              <a:t>Half were inconclusive because a real login server shows its login page before it validates the address — the same wall that puts deeper checks out of reach.</a:t>
+              <a:t>Half were inconclusive because a real login server shows its login page before it validates the address - the same wall that puts deeper checks out of reach.</a:t>
             </a:r>
           </a:p>
         </p:txBody>
@@ -16023,7 +16023,7 @@
                 </a:solidFill>
                 <a:latin typeface="Calibri"/>
               </a:rPr>
-              <a:t>Of the 47 we could test, none mishandled the forged return address: 23 rejected it outright, and 24 sat behind a login we can't pass. To even be testable, a server had to run a working OAuth registration-and-authorize flow — and the servers built well enough for that tended to validate the return address correctly too.</a:t>
+              <a:t>Of the 47 we could test, none mishandled the forged return address: 23 rejected it outright, and 24 sat behind a login we can't pass. To even be testable, a server had to run a working OAuth registration-and-authorize flow - and the servers built well enough for that tended to validate the return address correctly too.</a:t>
             </a:r>
           </a:p>
           <a:p>
@@ -16487,7 +16487,7 @@
                 </a:solidFill>
                 <a:latin typeface="Calibri"/>
               </a:rPr>
-              <a:t>38  live — boot a server and scan it</a:t>
+              <a:t>38  live - boot a server and scan it</a:t>
             </a:r>
           </a:p>
           <a:p>
@@ -16506,7 +16506,7 @@
                 </a:solidFill>
                 <a:latin typeface="Calibri"/>
               </a:rPr>
-              <a:t>111  unit — individual judgements</a:t>
+              <a:t>111  unit - individual judgements</a:t>
             </a:r>
           </a:p>
           <a:p>
@@ -16522,7 +16522,7 @@
                 </a:solidFill>
                 <a:latin typeface="Calibri"/>
               </a:rPr>
-              <a:t>64  regression — pin bugs we fixed</a:t>
+              <a:t>64  regression - pin bugs we fixed</a:t>
             </a:r>
           </a:p>
         </p:txBody>
@@ -17029,7 +17029,7 @@
                 </a:solidFill>
                 <a:latin typeface="Calibri"/>
               </a:rPr>
-              <a:t>we can see this hop                       invisible from outside — even with a token</a:t>
+              <a:t>we can see this hop                       invisible from outside - even with a token</a:t>
             </a:r>
           </a:p>
         </p:txBody>
@@ -17068,7 +17068,7 @@
                 </a:solidFill>
                 <a:latin typeface="Calibri"/>
               </a:rPr>
-              <a:t>We deliberately scoped the project to what a no-credential caller can observe. Some dangerous mistakes live on that second hop — a server passing your token to a back-end that shouldn't get it, or mixing up two users — which is not observable from outside in any case.</a:t>
+              <a:t>We deliberately scoped the project to what a no-credential caller can observe. Some dangerous mistakes live on that second hop - a server passing your token to a back-end that shouldn't get it, or mixing up two users - which is not observable from outside in any case.</a:t>
             </a:r>
           </a:p>
         </p:txBody>
@@ -17304,7 +17304,7 @@
                 </a:solidFill>
                 <a:latin typeface="Calibri"/>
               </a:rPr>
-              <a:t>Servers declare which revision they follow in the handshake — and many still run older ones. So the earlier rules (sessions included) still describe real servers in our sample; a newer spec does not retroactively fix them.</a:t>
+              <a:t>Servers declare which revision they follow in the handshake - and many still run older ones. So the earlier rules (sessions included) still describe real servers in our sample; a newer spec does not retroactively fix them.</a:t>
             </a:r>
           </a:p>
         </p:txBody>
@@ -17346,7 +17346,7 @@
                 </a:solidFill>
                 <a:latin typeface="Calibri"/>
               </a:rPr>
-              <a:t>•  Sessions were removed entirely in 2026-07-28 — so #5 and #6 still apply to the older revisions many servers keep running.</a:t>
+              <a:t>•  Sessions were removed entirely in 2026-07-28 - so #5 and #6 still apply to the older revisions many servers keep running.</a:t>
             </a:r>
           </a:p>
           <a:p>
@@ -17384,7 +17384,7 @@
                 </a:solidFill>
                 <a:latin typeface="Calibri"/>
               </a:rPr>
-              <a:t>•  Publishing the login-info page is now unconditional — which makes check #4 stronger.</a:t>
+              <a:t>•  Publishing the login-info page is now unconditional - which makes check #4 stronger.</a:t>
             </a:r>
           </a:p>
           <a:p>
@@ -17403,7 +17403,7 @@
                 </a:solidFill>
                 <a:latin typeface="Calibri"/>
               </a:rPr>
-              <a:t>•  Self-service registration is now deprecated — so #12's framing is already dated.</a:t>
+              <a:t>•  Self-service registration is now deprecated - so #12's framing is already dated.</a:t>
             </a:r>
           </a:p>
         </p:txBody>
@@ -17503,7 +17503,7 @@
                 </a:solidFill>
                 <a:latin typeface="Calibri"/>
               </a:rPr>
-              <a:t>MCP makes security optional — so the real question isn't whether it's secure, but which servers chose to be.</a:t>
+              <a:t>MCP makes security optional - so the real question isn't whether it's secure, but which servers chose to be.</a:t>
             </a:r>
           </a:p>
         </p:txBody>
@@ -17560,7 +17560,7 @@
                 </a:solidFill>
                 <a:latin typeface="Calibri"/>
               </a:rPr>
-              <a:t>, and most quick-starts spin up a server in two minutes with auth left off. Vulnerability in the wild isn't an accident — it's the default.</a:t>
+              <a:t>, and most quick-starts spin up a server in two minutes with auth left off. Vulnerability in the wild isn't an accident - it's the default.</a:t>
             </a:r>
           </a:p>
         </p:txBody>
@@ -17666,7 +17666,7 @@
                 </a:solidFill>
                 <a:latin typeface="Calibri"/>
               </a:rPr>
-              <a:t>Every recognisable vendor gated its tools; the servers open to a stranger were the newer, lesser-known ones — exactly what optional security predicts.</a:t>
+              <a:t>Every recognisable vendor gated its tools; the servers open to a stranger were the newer, lesser-known ones - exactly what optional security predicts.</a:t>
             </a:r>
           </a:p>
         </p:txBody>
@@ -17772,7 +17772,7 @@
                 </a:solidFill>
                 <a:latin typeface="Calibri"/>
               </a:rPr>
-              <a:t>An instrument that turns anecdote into measurement: 14 rule-based checks, each carrying its request and reply, reproducible against any public server — no login required.</a:t>
+              <a:t>An instrument that turns anecdote into measurement: 14 rule-based checks, each carrying its request and reply, reproducible against any public server - no login required.</a:t>
             </a:r>
           </a:p>
         </p:txBody>
@@ -17974,7 +17974,7 @@
                 </a:solidFill>
                 <a:latin typeface="Calibri"/>
               </a:rPr>
-              <a:t>No — every check cites a specific clause of a standard and returns the evidence for its verdict. The unit of output is a compliance judgement, not an open port.</a:t>
+              <a:t>No - every check cites a specific clause of a standard and returns the evidence for its verdict. The unit of output is a compliance judgement, not an open port.</a:t>
             </a:r>
           </a:p>
         </p:txBody>
@@ -18186,7 +18186,7 @@
                 </a:solidFill>
                 <a:latin typeface="Calibri"/>
               </a:rPr>
-              <a:t>They are other people's production servers. The point is measuring observable behaviour from outside — the position a real attacker is in.</a:t>
+              <a:t>They are other people's production servers. The point is measuring observable behaviour from outside - the position a real attacker is in.</a:t>
             </a:r>
           </a:p>
         </p:txBody>
@@ -18600,7 +18600,7 @@
                 </a:solidFill>
                 <a:latin typeface="Calibri"/>
               </a:rPr>
-              <a:t>Seven practice servers (one per posture) plus 213 tests — a check must pass against both a broken and a correct server.</a:t>
+              <a:t>Seven practice servers (one per posture) plus 213 tests - a check must pass against both a broken and a correct server.</a:t>
             </a:r>
           </a:p>
         </p:txBody>
@@ -18908,7 +18908,7 @@
                 </a:solidFill>
                 <a:latin typeface="Calibri"/>
               </a:rPr>
-              <a:t>Because the honest result and its cost — 76 registrations for zero findings — is the clearest measure of what write-class probing costs versus yields.</a:t>
+              <a:t>Because the honest result and its cost - 76 registrations for zero findings - is the clearest measure of what write-class probing costs versus yields.</a:t>
             </a:r>
           </a:p>
         </p:txBody>
@@ -19014,7 +19014,7 @@
                 </a:solidFill>
                 <a:latin typeface="Calibri"/>
               </a:rPr>
-              <a:t>This is our final submission, so nothing is planned — but the natural extensions are the 2026-07-28 revision (new headers), automatic registry discovery to scale past 83, and rate-limit handling.</a:t>
+              <a:t>This is our final submission, so nothing is planned - but the natural extensions are the 2026-07-28 revision (new headers), automatic registry discovery to scale past 83, and rate-limit handling.</a:t>
             </a:r>
           </a:p>
         </p:txBody>
@@ -19302,7 +19302,7 @@
                 </a:solidFill>
                 <a:latin typeface="Calibri"/>
               </a:rPr>
-              <a:t>a digital ticket — whoever holds it gets in, so a stolen one is as good as the original.</a:t>
+              <a:t>a digital ticket - whoever holds it gets in, so a stolen one is as good as the original.</a:t>
             </a:r>
           </a:p>
         </p:txBody>
@@ -19932,7 +19932,7 @@
                 </a:solidFill>
                 <a:latin typeface="Calibri"/>
               </a:rPr>
-              <a:t>Do real MCP servers implement MCP's authorization rules correctly — and can an outside caller with no account verify it, with evidence?</a:t>
+              <a:t>Do real MCP servers implement MCP's authorization rules correctly - and can an outside caller with no account verify it, with evidence?</a:t>
             </a:r>
           </a:p>
         </p:txBody>
@@ -19974,7 +19974,7 @@
                 </a:solidFill>
                 <a:latin typeface="Calibri"/>
               </a:rPr>
-              <a:t>Concretely — </a:t>
+              <a:t>Concretely - </a:t>
             </a:r>
             <a:r>
               <a:rPr sz="1600" b="0" i="0">
@@ -19999,7 +19999,7 @@
                 </a:solidFill>
                 <a:latin typeface="Calibri"/>
               </a:rPr>
-              <a:t>From the outside — </a:t>
+              <a:t>From the outside - </a:t>
             </a:r>
             <a:r>
               <a:rPr sz="1600" b="0" i="0">
@@ -20065,7 +20065,7 @@
                 </a:solidFill>
                 <a:latin typeface="Calibri"/>
               </a:rPr>
-              <a:t> — not whether the login is sound once you are through it.</a:t>
+              <a:t> - not whether the login is sound once you are through it.</a:t>
             </a:r>
           </a:p>
         </p:txBody>
@@ -20161,7 +20161,7 @@
                 </a:solidFill>
                 <a:latin typeface="Calibri"/>
               </a:rPr>
-              <a:t>How login works — and where the scanner stops</a:t>
+              <a:t>How login works - and where the scanner stops</a:t>
             </a:r>
           </a:p>
         </p:txBody>
@@ -20691,7 +20691,7 @@
                 </a:solidFill>
                 <a:latin typeface="Calibri"/>
               </a:rPr>
-              <a:t>The login pages are public and need no token — that is what makes half the checks possible.</a:t>
+              <a:t>The login pages are public and need no token - that is what makes half the checks possible.</a:t>
             </a:r>
           </a:p>
           <a:p>
@@ -21441,7 +21441,7 @@
                 </a:solidFill>
                 <a:latin typeface="Calibri"/>
               </a:rPr>
-              <a:t>•  Validate the target: confirm the URL is well-formed and safe to contact — the containment check (slide 9) — before any traffic is sent.</a:t>
+              <a:t>•  Validate the target: confirm the URL is well-formed and safe to contact - the containment check (slide 9) - before any traffic is sent.</a:t>
             </a:r>
           </a:p>
           <a:p>
@@ -21460,7 +21460,7 @@
                 </a:solidFill>
                 <a:latin typeface="Calibri"/>
               </a:rPr>
-              <a:t>•  Handshake: the opening MCP “initialize” exchange. The server may hand back a session id — a temporary “same conversation” label, not a password. We replay it so a server that merely wants one is not mistaken for secured.</a:t>
+              <a:t>•  Handshake: the opening MCP “initialize” exchange. The server may hand back a session id - a temporary “same conversation” label, not a password. We replay it so a server that merely wants one is not mistaken for secured.</a:t>
             </a:r>
           </a:p>
           <a:p>
@@ -21479,7 +21479,7 @@
                 </a:solidFill>
                 <a:latin typeface="Calibri"/>
               </a:rPr>
-              <a:t>•  Find the login pages: two public pages — where to log in, and the login server's own description. Two, because the MCP server and login server are often different companies. Fetched once and shared by every check that needs them.</a:t>
+              <a:t>•  Find the login pages: two public pages - where to log in, and the login server's own description. Two, because the MCP server and login server are often different companies. Fetched once and shared by every check that needs them.</a:t>
             </a:r>
           </a:p>
           <a:p>
@@ -21594,7 +21594,7 @@
                 </a:solidFill>
                 <a:latin typeface="Calibri"/>
               </a:rPr>
-              <a:t>Five possible answers — including an honest “I don't know”</a:t>
+              <a:t>Five possible answers - including an honest “I don't know”</a:t>
             </a:r>
           </a:p>
         </p:txBody>
@@ -22274,7 +22274,7 @@
                 </a:solidFill>
                 <a:latin typeface="Calibri"/>
               </a:rPr>
-              <a:t>INCONCLUSIVE is a real result — not a failure.</a:t>
+              <a:t>INCONCLUSIVE is a real result - not a failure.</a:t>
             </a:r>
           </a:p>
           <a:p>
@@ -22309,7 +22309,7 @@
                 </a:solidFill>
                 <a:latin typeface="Calibri"/>
               </a:rPr>
-              <a:t>Example — check #14 asks the login server to send the user back to an </a:t>
+              <a:t>Example - check #14 asks the login server to send the user back to an </a:t>
             </a:r>
             <a:r>
               <a:rPr sz="1350" b="0" i="1">
@@ -22327,7 +22327,7 @@
                 </a:solidFill>
                 <a:latin typeface="Calibri"/>
               </a:rPr>
-              <a:t> address. A correct server refuses; a broken one obeys. But many just answer 200 with a login page — and since we never log in, we can't see which way it resolves. Not a pass, not a gap: INCONCLUSIVE.</a:t>
+              <a:t> address. A correct server refuses; a broken one obeys. But many just answer 200 with a login page - and since we never log in, we can't see which way it resolves. Not a pass, not a gap: INCONCLUSIVE.</a:t>
             </a:r>
           </a:p>
         </p:txBody>
@@ -22465,7 +22465,7 @@
                 </a:solidFill>
                 <a:latin typeface="Calibri"/>
               </a:rPr>
-              <a:t>Each finding records the exact request we sent and the reply we got — the URL, the method, which headers we chose (an Authorization header is never present), and the response body.</a:t>
+              <a:t>Each finding records the exact request we sent and the reply we got - the URL, the method, which headers we chose (an Authorization header is never present), and the response body.</a:t>
             </a:r>
           </a:p>
           <a:p>
@@ -22722,7 +22722,7 @@
                 </a:solidFill>
                 <a:latin typeface="Calibri"/>
               </a:rPr>
-              <a:t>When a reply contains a secret — a token or client secret — we blank its value before writing to disk (client_secret: &lt;redacted&gt;), but keep the field name so the evidence still shows what the server returned.</a:t>
+              <a:t>When a reply contains a secret - a token or client secret - we blank its value before writing to disk (client_secret: &lt;redacted&gt;), but keep the field name so the evidence still shows what the server returned.</a:t>
             </a:r>
           </a:p>
         </p:txBody>
@@ -22857,7 +22857,7 @@
                 </a:solidFill>
                 <a:latin typeface="Calibri"/>
               </a:rPr>
-              <a:t>After the first request, almost every address the scanner visits is one the scanned server chose — where to log in, where to register. If we followed those blindly, a malicious server could aim our scanner at a victim of its choosing, and our tool would do the hitting for it.</a:t>
+              <a:t>After the first request, almost every address the scanner visits is one the scanned server chose - where to log in, where to register. If we followed those blindly, a malicious server could aim our scanner at a victim of its choosing, and our tool would do the hitting for it.</a:t>
             </a:r>
           </a:p>
         </p:txBody>
@@ -22918,7 +22918,7 @@
                 </a:solidFill>
                 <a:latin typeface="Calibri"/>
               </a:rPr>
-              <a:t>•  The only writes we make (registering a client) may reach the scanned server itself or a sibling on the same registered domain — never an unrelated third party.</a:t>
+              <a:t>•  The only writes we make (registering a client) may reach the scanned server itself or a sibling on the same registered domain - never an unrelated third party.</a:t>
             </a:r>
           </a:p>
         </p:txBody>
@@ -23005,7 +23005,7 @@
                 </a:solidFill>
                 <a:latin typeface="Calibri"/>
               </a:rPr>
-              <a:t>Real incident: while scanning api.serff.ai, an early version followed that server's own metadata to a registration endpoint on api.llow.io — a different company we never listed — and registered a client there. We added containment in response; it has since blocked one such cross-domain write (to login.semgrep.dev).</a:t>
+              <a:t>Real incident: while scanning api.serff.ai, an early version followed that server's own metadata to a registration endpoint on api.llow.io - a different company we never listed - and registered a client there. We added containment in response; it has since blocked one such cross-domain write (to login.semgrep.dev).</a:t>
             </a:r>
           </a:p>
         </p:txBody>
